--- a/FINAL_SUBMISSION/presentation.pptx
+++ b/FINAL_SUBMISSION/presentation.pptx
@@ -6,17 +6,15 @@
   </p:sldMasterIdLst>
   <p:sldIdLst>
     <p:sldId id="256" r:id="rId7"/>
-    <p:sldId id="257" r:id="rId9"/>
-    <p:sldId id="258" r:id="rId10"/>
-    <p:sldId id="259" r:id="rId11"/>
-    <p:sldId id="260" r:id="rId12"/>
-    <p:sldId id="261" r:id="rId13"/>
-    <p:sldId id="262" r:id="rId14"/>
-    <p:sldId id="263" r:id="rId15"/>
-    <p:sldId id="264" r:id="rId16"/>
-    <p:sldId id="265" r:id="rId17"/>
+    <p:sldId id="257" r:id="rId8"/>
+    <p:sldId id="258" r:id="rId9"/>
+    <p:sldId id="259" r:id="rId10"/>
+    <p:sldId id="260" r:id="rId11"/>
+    <p:sldId id="261" r:id="rId12"/>
+    <p:sldId id="262" r:id="rId13"/>
+    <p:sldId id="263" r:id="rId14"/>
   </p:sldIdLst>
-  <p:sldSz cx="9144000" cy="6858000" type="screen4x3"/>
+  <p:sldSz cx="12191695" cy="6858000" type="screen4x3"/>
   <p:notesSz cx="6858000" cy="9144000"/>
   <p:defaultTextStyle>
     <a:defPPr>
@@ -114,1056 +112,6 @@
     </a:lvl9pPr>
   </p:defaultTextStyle>
 </p:presentation>
-</file>
-
-<file path=ppt/notesMasters/notesMaster1.xml><?xml version="1.0" encoding="utf-8"?>
-<p:notesMaster xmlns:a="http://schemas.openxmlformats.org/drawingml/2006/main" xmlns:p="http://schemas.openxmlformats.org/presentationml/2006/main" xmlns:r="http://schemas.openxmlformats.org/officeDocument/2006/relationships">
-  <p:cSld>
-    <p:bg>
-      <p:bgRef idx="1001">
-        <a:schemeClr val="bg1"/>
-      </p:bgRef>
-    </p:bg>
-    <p:spTree>
-      <p:nvGrpSpPr>
-        <p:cNvPr id="1" name=""/>
-        <p:cNvGrpSpPr/>
-        <p:nvPr/>
-      </p:nvGrpSpPr>
-      <p:grpSpPr>
-        <a:xfrm>
-          <a:off x="0" y="0"/>
-          <a:ext cx="0" cy="0"/>
-          <a:chOff x="0" y="0"/>
-          <a:chExt cx="0" cy="0"/>
-        </a:xfrm>
-      </p:grpSpPr>
-      <p:sp>
-        <p:nvSpPr>
-          <p:cNvPr id="2" name="Header Placeholder 1"/>
-          <p:cNvSpPr>
-            <a:spLocks noGrp="1"/>
-          </p:cNvSpPr>
-          <p:nvPr>
-            <p:ph type="hdr" sz="quarter"/>
-          </p:nvPr>
-        </p:nvSpPr>
-        <p:spPr>
-          <a:xfrm>
-            <a:off x="0" y="0"/>
-            <a:ext cx="2971800" cy="457200"/>
-          </a:xfrm>
-          <a:prstGeom prst="rect">
-            <a:avLst/>
-          </a:prstGeom>
-        </p:spPr>
-        <p:txBody>
-          <a:bodyPr vert="horz" lIns="91440" tIns="45720" rIns="91440" bIns="45720" rtlCol="0"/>
-          <a:lstStyle>
-            <a:lvl1pPr algn="l">
-              <a:defRPr sz="1200"/>
-            </a:lvl1pPr>
-          </a:lstStyle>
-          <a:p>
-            <a:endParaRPr lang="en-US"/>
-          </a:p>
-        </p:txBody>
-      </p:sp>
-      <p:sp>
-        <p:nvSpPr>
-          <p:cNvPr id="3" name="Date Placeholder 2"/>
-          <p:cNvSpPr>
-            <a:spLocks noGrp="1"/>
-          </p:cNvSpPr>
-          <p:nvPr>
-            <p:ph type="dt" idx="1"/>
-          </p:nvPr>
-        </p:nvSpPr>
-        <p:spPr>
-          <a:xfrm>
-            <a:off x="3884613" y="0"/>
-            <a:ext cx="2971800" cy="457200"/>
-          </a:xfrm>
-          <a:prstGeom prst="rect">
-            <a:avLst/>
-          </a:prstGeom>
-        </p:spPr>
-        <p:txBody>
-          <a:bodyPr vert="horz" lIns="91440" tIns="45720" rIns="91440" bIns="45720" rtlCol="0"/>
-          <a:lstStyle>
-            <a:lvl1pPr algn="r">
-              <a:defRPr sz="1200"/>
-            </a:lvl1pPr>
-          </a:lstStyle>
-          <a:p>
-            <a:fld id="{0F89C1C7-3DCD-1040-A9CF-14679D8B5DDD}" type="datetimeFigureOut">
-              <a:rPr lang="en-US" smtClean="0"/>
-              <a:t>10/17/16</a:t>
-            </a:fld>
-            <a:endParaRPr lang="en-US"/>
-          </a:p>
-        </p:txBody>
-      </p:sp>
-      <p:sp>
-        <p:nvSpPr>
-          <p:cNvPr id="4" name="Slide Image Placeholder 3"/>
-          <p:cNvSpPr>
-            <a:spLocks noGrp="1" noRot="1" noChangeAspect="1"/>
-          </p:cNvSpPr>
-          <p:nvPr>
-            <p:ph type="sldImg" idx="2"/>
-          </p:nvPr>
-        </p:nvSpPr>
-        <p:spPr>
-          <a:xfrm>
-            <a:off x="1143000" y="685800"/>
-            <a:ext cx="4572000" cy="3429000"/>
-          </a:xfrm>
-          <a:prstGeom prst="rect">
-            <a:avLst/>
-          </a:prstGeom>
-          <a:noFill/>
-          <a:ln w="12700">
-            <a:solidFill>
-              <a:prstClr val="black"/>
-            </a:solidFill>
-          </a:ln>
-        </p:spPr>
-        <p:txBody>
-          <a:bodyPr vert="horz" lIns="91440" tIns="45720" rIns="91440" bIns="45720" rtlCol="0" anchor="ctr"/>
-          <a:lstStyle/>
-          <a:p>
-            <a:endParaRPr lang="en-US"/>
-          </a:p>
-        </p:txBody>
-      </p:sp>
-      <p:sp>
-        <p:nvSpPr>
-          <p:cNvPr id="5" name="Notes Placeholder 4"/>
-          <p:cNvSpPr>
-            <a:spLocks noGrp="1"/>
-          </p:cNvSpPr>
-          <p:nvPr>
-            <p:ph type="body" sz="quarter" idx="3"/>
-          </p:nvPr>
-        </p:nvSpPr>
-        <p:spPr>
-          <a:xfrm>
-            <a:off x="685800" y="4343400"/>
-            <a:ext cx="5486400" cy="4114800"/>
-          </a:xfrm>
-          <a:prstGeom prst="rect">
-            <a:avLst/>
-          </a:prstGeom>
-        </p:spPr>
-        <p:txBody>
-          <a:bodyPr vert="horz" lIns="91440" tIns="45720" rIns="91440" bIns="45720" rtlCol="0"/>
-          <a:lstStyle/>
-          <a:p>
-            <a:pPr lvl="0"/>
-            <a:r>
-              <a:rPr lang="en-US" smtClean="0"/>
-              <a:t>Click to edit Master text styles</a:t>
-            </a:r>
-          </a:p>
-          <a:p>
-            <a:pPr lvl="1"/>
-            <a:r>
-              <a:rPr lang="en-US" smtClean="0"/>
-              <a:t>Second level</a:t>
-            </a:r>
-          </a:p>
-          <a:p>
-            <a:pPr lvl="2"/>
-            <a:r>
-              <a:rPr lang="en-US" smtClean="0"/>
-              <a:t>Third level</a:t>
-            </a:r>
-          </a:p>
-          <a:p>
-            <a:pPr lvl="3"/>
-            <a:r>
-              <a:rPr lang="en-US" smtClean="0"/>
-              <a:t>Fourth level</a:t>
-            </a:r>
-          </a:p>
-          <a:p>
-            <a:pPr lvl="4"/>
-            <a:r>
-              <a:rPr lang="en-US" smtClean="0"/>
-              <a:t>Fifth level</a:t>
-            </a:r>
-            <a:endParaRPr lang="en-US"/>
-          </a:p>
-        </p:txBody>
-      </p:sp>
-      <p:sp>
-        <p:nvSpPr>
-          <p:cNvPr id="6" name="Footer Placeholder 5"/>
-          <p:cNvSpPr>
-            <a:spLocks noGrp="1"/>
-          </p:cNvSpPr>
-          <p:nvPr>
-            <p:ph type="ftr" sz="quarter" idx="4"/>
-          </p:nvPr>
-        </p:nvSpPr>
-        <p:spPr>
-          <a:xfrm>
-            <a:off x="0" y="8685213"/>
-            <a:ext cx="2971800" cy="457200"/>
-          </a:xfrm>
-          <a:prstGeom prst="rect">
-            <a:avLst/>
-          </a:prstGeom>
-        </p:spPr>
-        <p:txBody>
-          <a:bodyPr vert="horz" lIns="91440" tIns="45720" rIns="91440" bIns="45720" rtlCol="0" anchor="b"/>
-          <a:lstStyle>
-            <a:lvl1pPr algn="l">
-              <a:defRPr sz="1200"/>
-            </a:lvl1pPr>
-          </a:lstStyle>
-          <a:p>
-            <a:endParaRPr lang="en-US"/>
-          </a:p>
-        </p:txBody>
-      </p:sp>
-      <p:sp>
-        <p:nvSpPr>
-          <p:cNvPr id="7" name="Slide Number Placeholder 6"/>
-          <p:cNvSpPr>
-            <a:spLocks noGrp="1"/>
-          </p:cNvSpPr>
-          <p:nvPr>
-            <p:ph type="sldNum" sz="quarter" idx="5"/>
-          </p:nvPr>
-        </p:nvSpPr>
-        <p:spPr>
-          <a:xfrm>
-            <a:off x="3884613" y="8685213"/>
-            <a:ext cx="2971800" cy="457200"/>
-          </a:xfrm>
-          <a:prstGeom prst="rect">
-            <a:avLst/>
-          </a:prstGeom>
-        </p:spPr>
-        <p:txBody>
-          <a:bodyPr vert="horz" lIns="91440" tIns="45720" rIns="91440" bIns="45720" rtlCol="0" anchor="b"/>
-          <a:lstStyle>
-            <a:lvl1pPr algn="r">
-              <a:defRPr sz="1200"/>
-            </a:lvl1pPr>
-          </a:lstStyle>
-          <a:p>
-            <a:fld id="{BB5E49A5-4136-284D-997B-48E1D791AD67}" type="slidenum">
-              <a:rPr lang="en-US" smtClean="0"/>
-              <a:t>‹#›</a:t>
-            </a:fld>
-            <a:endParaRPr lang="en-US"/>
-          </a:p>
-        </p:txBody>
-      </p:sp>
-    </p:spTree>
-    <p:extLst>
-      <p:ext uri="{BB962C8B-B14F-4D97-AF65-F5344CB8AC3E}">
-        <p14:creationId xmlns:p14="http://schemas.microsoft.com/office/powerpoint/2010/main" val="2623252185"/>
-      </p:ext>
-    </p:extLst>
-  </p:cSld>
-  <p:clrMap bg1="lt1" tx1="dk1" bg2="lt2" tx2="dk2" accent1="accent1" accent2="accent2" accent3="accent3" accent4="accent4" accent5="accent5" accent6="accent6" hlink="hlink" folHlink="folHlink"/>
-  <p:notesStyle>
-    <a:lvl1pPr marL="0" algn="l" defTabSz="457200" rtl="0" eaLnBrk="1" latinLnBrk="0" hangingPunct="1">
-      <a:defRPr sz="1200" kern="1200">
-        <a:solidFill>
-          <a:schemeClr val="tx1"/>
-        </a:solidFill>
-        <a:latin typeface="+mn-lt"/>
-        <a:ea typeface="+mn-ea"/>
-        <a:cs typeface="+mn-cs"/>
-      </a:defRPr>
-    </a:lvl1pPr>
-    <a:lvl2pPr marL="457200" algn="l" defTabSz="457200" rtl="0" eaLnBrk="1" latinLnBrk="0" hangingPunct="1">
-      <a:defRPr sz="1200" kern="1200">
-        <a:solidFill>
-          <a:schemeClr val="tx1"/>
-        </a:solidFill>
-        <a:latin typeface="+mn-lt"/>
-        <a:ea typeface="+mn-ea"/>
-        <a:cs typeface="+mn-cs"/>
-      </a:defRPr>
-    </a:lvl2pPr>
-    <a:lvl3pPr marL="914400" algn="l" defTabSz="457200" rtl="0" eaLnBrk="1" latinLnBrk="0" hangingPunct="1">
-      <a:defRPr sz="1200" kern="1200">
-        <a:solidFill>
-          <a:schemeClr val="tx1"/>
-        </a:solidFill>
-        <a:latin typeface="+mn-lt"/>
-        <a:ea typeface="+mn-ea"/>
-        <a:cs typeface="+mn-cs"/>
-      </a:defRPr>
-    </a:lvl3pPr>
-    <a:lvl4pPr marL="1371600" algn="l" defTabSz="457200" rtl="0" eaLnBrk="1" latinLnBrk="0" hangingPunct="1">
-      <a:defRPr sz="1200" kern="1200">
-        <a:solidFill>
-          <a:schemeClr val="tx1"/>
-        </a:solidFill>
-        <a:latin typeface="+mn-lt"/>
-        <a:ea typeface="+mn-ea"/>
-        <a:cs typeface="+mn-cs"/>
-      </a:defRPr>
-    </a:lvl4pPr>
-    <a:lvl5pPr marL="1828800" algn="l" defTabSz="457200" rtl="0" eaLnBrk="1" latinLnBrk="0" hangingPunct="1">
-      <a:defRPr sz="1200" kern="1200">
-        <a:solidFill>
-          <a:schemeClr val="tx1"/>
-        </a:solidFill>
-        <a:latin typeface="+mn-lt"/>
-        <a:ea typeface="+mn-ea"/>
-        <a:cs typeface="+mn-cs"/>
-      </a:defRPr>
-    </a:lvl5pPr>
-    <a:lvl6pPr marL="2286000" algn="l" defTabSz="457200" rtl="0" eaLnBrk="1" latinLnBrk="0" hangingPunct="1">
-      <a:defRPr sz="1200" kern="1200">
-        <a:solidFill>
-          <a:schemeClr val="tx1"/>
-        </a:solidFill>
-        <a:latin typeface="+mn-lt"/>
-        <a:ea typeface="+mn-ea"/>
-        <a:cs typeface="+mn-cs"/>
-      </a:defRPr>
-    </a:lvl6pPr>
-    <a:lvl7pPr marL="2743200" algn="l" defTabSz="457200" rtl="0" eaLnBrk="1" latinLnBrk="0" hangingPunct="1">
-      <a:defRPr sz="1200" kern="1200">
-        <a:solidFill>
-          <a:schemeClr val="tx1"/>
-        </a:solidFill>
-        <a:latin typeface="+mn-lt"/>
-        <a:ea typeface="+mn-ea"/>
-        <a:cs typeface="+mn-cs"/>
-      </a:defRPr>
-    </a:lvl7pPr>
-    <a:lvl8pPr marL="3200400" algn="l" defTabSz="457200" rtl="0" eaLnBrk="1" latinLnBrk="0" hangingPunct="1">
-      <a:defRPr sz="1200" kern="1200">
-        <a:solidFill>
-          <a:schemeClr val="tx1"/>
-        </a:solidFill>
-        <a:latin typeface="+mn-lt"/>
-        <a:ea typeface="+mn-ea"/>
-        <a:cs typeface="+mn-cs"/>
-      </a:defRPr>
-    </a:lvl8pPr>
-    <a:lvl9pPr marL="3657600" algn="l" defTabSz="457200" rtl="0" eaLnBrk="1" latinLnBrk="0" hangingPunct="1">
-      <a:defRPr sz="1200" kern="1200">
-        <a:solidFill>
-          <a:schemeClr val="tx1"/>
-        </a:solidFill>
-        <a:latin typeface="+mn-lt"/>
-        <a:ea typeface="+mn-ea"/>
-        <a:cs typeface="+mn-cs"/>
-      </a:defRPr>
-    </a:lvl9pPr>
-  </p:notesStyle>
-</p:notesMaster>
-</file>
-
-<file path=ppt/notesSlides/notesSlide1.xml><?xml version="1.0" encoding="utf-8"?>
-<p:notes xmlns:a="http://schemas.openxmlformats.org/drawingml/2006/main" xmlns:p="http://schemas.openxmlformats.org/presentationml/2006/main" xmlns:r="http://schemas.openxmlformats.org/officeDocument/2006/relationships">
-  <p:cSld>
-    <p:spTree>
-      <p:nvGrpSpPr>
-        <p:cNvPr id="1" name=""/>
-        <p:cNvGrpSpPr/>
-        <p:nvPr/>
-      </p:nvGrpSpPr>
-      <p:grpSpPr>
-        <a:xfrm>
-          <a:off x="0" y="0"/>
-          <a:ext cx="0" cy="0"/>
-          <a:chOff x="0" y="0"/>
-          <a:chExt cx="0" cy="0"/>
-        </a:xfrm>
-      </p:grpSpPr>
-      <p:sp>
-        <p:nvSpPr>
-          <p:cNvPr id="2" name="Slide Image Placeholder 1"/>
-          <p:cNvSpPr>
-            <a:spLocks noGrp="1"/>
-          </p:cNvSpPr>
-          <p:nvPr>
-            <p:ph type="sldImg" idx="2"/>
-          </p:nvPr>
-        </p:nvSpPr>
-        <p:spPr/>
-      </p:sp>
-      <p:sp>
-        <p:nvSpPr>
-          <p:cNvPr id="3" name="Notes Placeholder 2"/>
-          <p:cNvSpPr>
-            <a:spLocks noGrp="1"/>
-          </p:cNvSpPr>
-          <p:nvPr>
-            <p:ph type="body" idx="3" sz="quarter"/>
-          </p:nvPr>
-        </p:nvSpPr>
-        <p:spPr/>
-        <p:txBody>
-          <a:bodyPr/>
-          <a:lstStyle/>
-          <a:p>
-            <a:r>
-              <a:t>Good afternoon Prof. Renuka Pawar and faculty members. Today our team presents our research on Variable Key Length Impacts on Memory Allocation and Throughput in Blowfish Cryptographic Frameworks. This project adheres strictly to the SPIT Collaborative R&amp;D Manifest for A.Y. 2026-27.</a:t>
-            </a:r>
-          </a:p>
-        </p:txBody>
-      </p:sp>
-      <p:sp>
-        <p:nvSpPr>
-          <p:cNvPr id="4" name="Slide Number Placeholder 3"/>
-          <p:cNvSpPr>
-            <a:spLocks noGrp="1"/>
-          </p:cNvSpPr>
-          <p:nvPr>
-            <p:ph type="sldNum" idx="5" sz="quarter"/>
-          </p:nvPr>
-        </p:nvSpPr>
-        <p:spPr/>
-      </p:sp>
-    </p:spTree>
-  </p:cSld>
-  <p:clrMapOvr>
-    <a:masterClrMapping/>
-  </p:clrMapOvr>
-</p:notes>
-</file>
-
-<file path=ppt/notesSlides/notesSlide10.xml><?xml version="1.0" encoding="utf-8"?>
-<p:notes xmlns:a="http://schemas.openxmlformats.org/drawingml/2006/main" xmlns:p="http://schemas.openxmlformats.org/presentationml/2006/main" xmlns:r="http://schemas.openxmlformats.org/officeDocument/2006/relationships">
-  <p:cSld>
-    <p:spTree>
-      <p:nvGrpSpPr>
-        <p:cNvPr id="1" name=""/>
-        <p:cNvGrpSpPr/>
-        <p:nvPr/>
-      </p:nvGrpSpPr>
-      <p:grpSpPr>
-        <a:xfrm>
-          <a:off x="0" y="0"/>
-          <a:ext cx="0" cy="0"/>
-          <a:chOff x="0" y="0"/>
-          <a:chExt cx="0" cy="0"/>
-        </a:xfrm>
-      </p:grpSpPr>
-      <p:sp>
-        <p:nvSpPr>
-          <p:cNvPr id="2" name="Slide Image Placeholder 1"/>
-          <p:cNvSpPr>
-            <a:spLocks noGrp="1"/>
-          </p:cNvSpPr>
-          <p:nvPr>
-            <p:ph type="sldImg" idx="2"/>
-          </p:nvPr>
-        </p:nvSpPr>
-        <p:spPr/>
-      </p:sp>
-      <p:sp>
-        <p:nvSpPr>
-          <p:cNvPr id="3" name="Notes Placeholder 2"/>
-          <p:cNvSpPr>
-            <a:spLocks noGrp="1"/>
-          </p:cNvSpPr>
-          <p:nvPr>
-            <p:ph type="body" idx="3" sz="quarter"/>
-          </p:nvPr>
-        </p:nvSpPr>
-        <p:spPr/>
-        <p:txBody>
-          <a:bodyPr/>
-          <a:lstStyle/>
-          <a:p>
-            <a:r>
-              <a:t>Summarize the main conclusions. Reiterate that the project completes all 4 weeks of Prof. Renuka Pawar's collaborative R&amp;D manifest. Conclude by thanking the faculty and inviting questions.</a:t>
-            </a:r>
-          </a:p>
-        </p:txBody>
-      </p:sp>
-      <p:sp>
-        <p:nvSpPr>
-          <p:cNvPr id="4" name="Slide Number Placeholder 3"/>
-          <p:cNvSpPr>
-            <a:spLocks noGrp="1"/>
-          </p:cNvSpPr>
-          <p:nvPr>
-            <p:ph type="sldNum" idx="5" sz="quarter"/>
-          </p:nvPr>
-        </p:nvSpPr>
-        <p:spPr/>
-      </p:sp>
-    </p:spTree>
-  </p:cSld>
-  <p:clrMapOvr>
-    <a:masterClrMapping/>
-  </p:clrMapOvr>
-</p:notes>
-</file>
-
-<file path=ppt/notesSlides/notesSlide2.xml><?xml version="1.0" encoding="utf-8"?>
-<p:notes xmlns:a="http://schemas.openxmlformats.org/drawingml/2006/main" xmlns:p="http://schemas.openxmlformats.org/presentationml/2006/main" xmlns:r="http://schemas.openxmlformats.org/officeDocument/2006/relationships">
-  <p:cSld>
-    <p:spTree>
-      <p:nvGrpSpPr>
-        <p:cNvPr id="1" name=""/>
-        <p:cNvGrpSpPr/>
-        <p:nvPr/>
-      </p:nvGrpSpPr>
-      <p:grpSpPr>
-        <a:xfrm>
-          <a:off x="0" y="0"/>
-          <a:ext cx="0" cy="0"/>
-          <a:chOff x="0" y="0"/>
-          <a:chExt cx="0" cy="0"/>
-        </a:xfrm>
-      </p:grpSpPr>
-      <p:sp>
-        <p:nvSpPr>
-          <p:cNvPr id="2" name="Slide Image Placeholder 1"/>
-          <p:cNvSpPr>
-            <a:spLocks noGrp="1"/>
-          </p:cNvSpPr>
-          <p:nvPr>
-            <p:ph type="sldImg" idx="2"/>
-          </p:nvPr>
-        </p:nvSpPr>
-        <p:spPr/>
-      </p:sp>
-      <p:sp>
-        <p:nvSpPr>
-          <p:cNvPr id="3" name="Notes Placeholder 2"/>
-          <p:cNvSpPr>
-            <a:spLocks noGrp="1"/>
-          </p:cNvSpPr>
-          <p:nvPr>
-            <p:ph type="body" idx="3" sz="quarter"/>
-          </p:nvPr>
-        </p:nvSpPr>
-        <p:spPr/>
-        <p:txBody>
-          <a:bodyPr/>
-          <a:lstStyle/>
-          <a:p>
-            <a:r>
-              <a:t>Here we outline why this study is critical. Modern ciphers are rigid, while Blowfish represents a variable-key architecture. We address the empirical gap: what actually happens to system memory and processing speed when you scale the key from 32 bits all the way to 448 bits?</a:t>
-            </a:r>
-          </a:p>
-        </p:txBody>
-      </p:sp>
-      <p:sp>
-        <p:nvSpPr>
-          <p:cNvPr id="4" name="Slide Number Placeholder 3"/>
-          <p:cNvSpPr>
-            <a:spLocks noGrp="1"/>
-          </p:cNvSpPr>
-          <p:nvPr>
-            <p:ph type="sldNum" idx="5" sz="quarter"/>
-          </p:nvPr>
-        </p:nvSpPr>
-        <p:spPr/>
-      </p:sp>
-    </p:spTree>
-  </p:cSld>
-  <p:clrMapOvr>
-    <a:masterClrMapping/>
-  </p:clrMapOvr>
-</p:notes>
-</file>
-
-<file path=ppt/notesSlides/notesSlide3.xml><?xml version="1.0" encoding="utf-8"?>
-<p:notes xmlns:a="http://schemas.openxmlformats.org/drawingml/2006/main" xmlns:p="http://schemas.openxmlformats.org/presentationml/2006/main" xmlns:r="http://schemas.openxmlformats.org/officeDocument/2006/relationships">
-  <p:cSld>
-    <p:spTree>
-      <p:nvGrpSpPr>
-        <p:cNvPr id="1" name=""/>
-        <p:cNvGrpSpPr/>
-        <p:nvPr/>
-      </p:nvGrpSpPr>
-      <p:grpSpPr>
-        <a:xfrm>
-          <a:off x="0" y="0"/>
-          <a:ext cx="0" cy="0"/>
-          <a:chOff x="0" y="0"/>
-          <a:chExt cx="0" cy="0"/>
-        </a:xfrm>
-      </p:grpSpPr>
-      <p:sp>
-        <p:nvSpPr>
-          <p:cNvPr id="2" name="Slide Image Placeholder 1"/>
-          <p:cNvSpPr>
-            <a:spLocks noGrp="1"/>
-          </p:cNvSpPr>
-          <p:nvPr>
-            <p:ph type="sldImg" idx="2"/>
-          </p:nvPr>
-        </p:nvSpPr>
-        <p:spPr/>
-      </p:sp>
-      <p:sp>
-        <p:nvSpPr>
-          <p:cNvPr id="3" name="Notes Placeholder 2"/>
-          <p:cNvSpPr>
-            <a:spLocks noGrp="1"/>
-          </p:cNvSpPr>
-          <p:nvPr>
-            <p:ph type="body" idx="3" sz="quarter"/>
-          </p:nvPr>
-        </p:nvSpPr>
-        <p:spPr/>
-        <p:txBody>
-          <a:bodyPr/>
-          <a:lstStyle/>
-          <a:p>
-            <a:r>
-              <a:t>Explain the mathematical engine of Blowfish: 16-round Feistel, four S-boxes, and crucially, the 521 iterative block encryptions that populate the P-array and S-boxes. Emphasize that 521 encryptions happen regardless of whether the key is 32 bits or 448 bits.</a:t>
-            </a:r>
-          </a:p>
-        </p:txBody>
-      </p:sp>
-      <p:sp>
-        <p:nvSpPr>
-          <p:cNvPr id="4" name="Slide Number Placeholder 3"/>
-          <p:cNvSpPr>
-            <a:spLocks noGrp="1"/>
-          </p:cNvSpPr>
-          <p:nvPr>
-            <p:ph type="sldNum" idx="5" sz="quarter"/>
-          </p:nvPr>
-        </p:nvSpPr>
-        <p:spPr/>
-      </p:sp>
-    </p:spTree>
-  </p:cSld>
-  <p:clrMapOvr>
-    <a:masterClrMapping/>
-  </p:clrMapOvr>
-</p:notes>
-</file>
-
-<file path=ppt/notesSlides/notesSlide4.xml><?xml version="1.0" encoding="utf-8"?>
-<p:notes xmlns:a="http://schemas.openxmlformats.org/drawingml/2006/main" xmlns:p="http://schemas.openxmlformats.org/presentationml/2006/main" xmlns:r="http://schemas.openxmlformats.org/officeDocument/2006/relationships">
-  <p:cSld>
-    <p:spTree>
-      <p:nvGrpSpPr>
-        <p:cNvPr id="1" name=""/>
-        <p:cNvGrpSpPr/>
-        <p:nvPr/>
-      </p:nvGrpSpPr>
-      <p:grpSpPr>
-        <a:xfrm>
-          <a:off x="0" y="0"/>
-          <a:ext cx="0" cy="0"/>
-          <a:chOff x="0" y="0"/>
-          <a:chExt cx="0" cy="0"/>
-        </a:xfrm>
-      </p:grpSpPr>
-      <p:sp>
-        <p:nvSpPr>
-          <p:cNvPr id="2" name="Slide Image Placeholder 1"/>
-          <p:cNvSpPr>
-            <a:spLocks noGrp="1"/>
-          </p:cNvSpPr>
-          <p:nvPr>
-            <p:ph type="sldImg" idx="2"/>
-          </p:nvPr>
-        </p:nvSpPr>
-        <p:spPr/>
-      </p:sp>
-      <p:sp>
-        <p:nvSpPr>
-          <p:cNvPr id="3" name="Notes Placeholder 2"/>
-          <p:cNvSpPr>
-            <a:spLocks noGrp="1"/>
-          </p:cNvSpPr>
-          <p:nvPr>
-            <p:ph type="body" idx="3" sz="quarter"/>
-          </p:nvPr>
-        </p:nvSpPr>
-        <p:spPr/>
-        <p:txBody>
-          <a:bodyPr/>
-          <a:lstStyle/>
-          <a:p>
-            <a:r>
-              <a:t>Walk the faculty through the five hypotheses. Remind them that in scientific research, these are treated as hypotheses to investigate empirically, not predetermined assumptions.</a:t>
-            </a:r>
-          </a:p>
-        </p:txBody>
-      </p:sp>
-      <p:sp>
-        <p:nvSpPr>
-          <p:cNvPr id="4" name="Slide Number Placeholder 3"/>
-          <p:cNvSpPr>
-            <a:spLocks noGrp="1"/>
-          </p:cNvSpPr>
-          <p:nvPr>
-            <p:ph type="sldNum" idx="5" sz="quarter"/>
-          </p:nvPr>
-        </p:nvSpPr>
-        <p:spPr/>
-      </p:sp>
-    </p:spTree>
-  </p:cSld>
-  <p:clrMapOvr>
-    <a:masterClrMapping/>
-  </p:clrMapOvr>
-</p:notes>
-</file>
-
-<file path=ppt/notesSlides/notesSlide5.xml><?xml version="1.0" encoding="utf-8"?>
-<p:notes xmlns:a="http://schemas.openxmlformats.org/drawingml/2006/main" xmlns:p="http://schemas.openxmlformats.org/presentationml/2006/main" xmlns:r="http://schemas.openxmlformats.org/officeDocument/2006/relationships">
-  <p:cSld>
-    <p:spTree>
-      <p:nvGrpSpPr>
-        <p:cNvPr id="1" name=""/>
-        <p:cNvGrpSpPr/>
-        <p:nvPr/>
-      </p:nvGrpSpPr>
-      <p:grpSpPr>
-        <a:xfrm>
-          <a:off x="0" y="0"/>
-          <a:ext cx="0" cy="0"/>
-          <a:chOff x="0" y="0"/>
-          <a:chExt cx="0" cy="0"/>
-        </a:xfrm>
-      </p:grpSpPr>
-      <p:sp>
-        <p:nvSpPr>
-          <p:cNvPr id="2" name="Slide Image Placeholder 1"/>
-          <p:cNvSpPr>
-            <a:spLocks noGrp="1"/>
-          </p:cNvSpPr>
-          <p:nvPr>
-            <p:ph type="sldImg" idx="2"/>
-          </p:nvPr>
-        </p:nvSpPr>
-        <p:spPr/>
-      </p:sp>
-      <p:sp>
-        <p:nvSpPr>
-          <p:cNvPr id="3" name="Notes Placeholder 2"/>
-          <p:cNvSpPr>
-            <a:spLocks noGrp="1"/>
-          </p:cNvSpPr>
-          <p:nvPr>
-            <p:ph type="body" idx="3" sz="quarter"/>
-          </p:nvPr>
-        </p:nvSpPr>
-        <p:spPr/>
-        <p:txBody>
-          <a:bodyPr/>
-          <a:lstStyle/>
-          <a:p>
-            <a:r>
-              <a:t>Highlight the rigor of the benchmark matrix: 14 key sizes, 5 workloads, 3 warmups + 10 measured reps = 1,820 trials. Point out the fresh random IV per trial, strictly conforming to NIST SP 800-38A.</a:t>
-            </a:r>
-          </a:p>
-        </p:txBody>
-      </p:sp>
-      <p:sp>
-        <p:nvSpPr>
-          <p:cNvPr id="4" name="Slide Number Placeholder 3"/>
-          <p:cNvSpPr>
-            <a:spLocks noGrp="1"/>
-          </p:cNvSpPr>
-          <p:nvPr>
-            <p:ph type="sldNum" idx="5" sz="quarter"/>
-          </p:nvPr>
-        </p:nvSpPr>
-        <p:spPr/>
-      </p:sp>
-    </p:spTree>
-  </p:cSld>
-  <p:clrMapOvr>
-    <a:masterClrMapping/>
-  </p:clrMapOvr>
-</p:notes>
-</file>
-
-<file path=ppt/notesSlides/notesSlide6.xml><?xml version="1.0" encoding="utf-8"?>
-<p:notes xmlns:a="http://schemas.openxmlformats.org/drawingml/2006/main" xmlns:p="http://schemas.openxmlformats.org/presentationml/2006/main" xmlns:r="http://schemas.openxmlformats.org/officeDocument/2006/relationships">
-  <p:cSld>
-    <p:spTree>
-      <p:nvGrpSpPr>
-        <p:cNvPr id="1" name=""/>
-        <p:cNvGrpSpPr/>
-        <p:nvPr/>
-      </p:nvGrpSpPr>
-      <p:grpSpPr>
-        <a:xfrm>
-          <a:off x="0" y="0"/>
-          <a:ext cx="0" cy="0"/>
-          <a:chOff x="0" y="0"/>
-          <a:chExt cx="0" cy="0"/>
-        </a:xfrm>
-      </p:grpSpPr>
-      <p:sp>
-        <p:nvSpPr>
-          <p:cNvPr id="2" name="Slide Image Placeholder 1"/>
-          <p:cNvSpPr>
-            <a:spLocks noGrp="1"/>
-          </p:cNvSpPr>
-          <p:nvPr>
-            <p:ph type="sldImg" idx="2"/>
-          </p:nvPr>
-        </p:nvSpPr>
-        <p:spPr/>
-      </p:sp>
-      <p:sp>
-        <p:nvSpPr>
-          <p:cNvPr id="3" name="Notes Placeholder 2"/>
-          <p:cNvSpPr>
-            <a:spLocks noGrp="1"/>
-          </p:cNvSpPr>
-          <p:nvPr>
-            <p:ph type="body" idx="3" sz="quarter"/>
-          </p:nvPr>
-        </p:nvSpPr>
-        <p:spPr/>
-        <p:txBody>
-          <a:bodyPr/>
-          <a:lstStyle/>
-          <a:p>
-            <a:r>
-              <a:t>Direct faculty attention to Figure 1 and 2. Point out that the p-value is 0.1548, which is above 0.05, and R-squared is 0.0051. Key length explains less than 0.5% of variance in initialization time! The 521 iterative encryptions dominate everything.</a:t>
-            </a:r>
-          </a:p>
-        </p:txBody>
-      </p:sp>
-      <p:sp>
-        <p:nvSpPr>
-          <p:cNvPr id="4" name="Slide Number Placeholder 3"/>
-          <p:cNvSpPr>
-            <a:spLocks noGrp="1"/>
-          </p:cNvSpPr>
-          <p:nvPr>
-            <p:ph type="sldNum" idx="5" sz="quarter"/>
-          </p:nvPr>
-        </p:nvSpPr>
-        <p:spPr/>
-      </p:sp>
-    </p:spTree>
-  </p:cSld>
-  <p:clrMapOvr>
-    <a:masterClrMapping/>
-  </p:clrMapOvr>
-</p:notes>
-</file>
-
-<file path=ppt/notesSlides/notesSlide7.xml><?xml version="1.0" encoding="utf-8"?>
-<p:notes xmlns:a="http://schemas.openxmlformats.org/drawingml/2006/main" xmlns:p="http://schemas.openxmlformats.org/presentationml/2006/main" xmlns:r="http://schemas.openxmlformats.org/officeDocument/2006/relationships">
-  <p:cSld>
-    <p:spTree>
-      <p:nvGrpSpPr>
-        <p:cNvPr id="1" name=""/>
-        <p:cNvGrpSpPr/>
-        <p:nvPr/>
-      </p:nvGrpSpPr>
-      <p:grpSpPr>
-        <a:xfrm>
-          <a:off x="0" y="0"/>
-          <a:ext cx="0" cy="0"/>
-          <a:chOff x="0" y="0"/>
-          <a:chExt cx="0" cy="0"/>
-        </a:xfrm>
-      </p:grpSpPr>
-      <p:sp>
-        <p:nvSpPr>
-          <p:cNvPr id="2" name="Slide Image Placeholder 1"/>
-          <p:cNvSpPr>
-            <a:spLocks noGrp="1"/>
-          </p:cNvSpPr>
-          <p:nvPr>
-            <p:ph type="sldImg" idx="2"/>
-          </p:nvPr>
-        </p:nvSpPr>
-        <p:spPr/>
-      </p:sp>
-      <p:sp>
-        <p:nvSpPr>
-          <p:cNvPr id="3" name="Notes Placeholder 2"/>
-          <p:cNvSpPr>
-            <a:spLocks noGrp="1"/>
-          </p:cNvSpPr>
-          <p:nvPr>
-            <p:ph type="body" idx="3" sz="quarter"/>
-          </p:nvPr>
-        </p:nvSpPr>
-        <p:spPr/>
-        <p:txBody>
-          <a:bodyPr/>
-          <a:lstStyle/>
-          <a:p>
-            <a:r>
-              <a:t>Explain Figure 3 and 5. At 1 KiB, throughput is low due to fixed invocation overhead. As file size reaches 100 KiB and 1 MiB, throughput saturates. Notice how in Figure 5, the bars for all 14 key lengths are virtually flat for each file size.</a:t>
-            </a:r>
-          </a:p>
-        </p:txBody>
-      </p:sp>
-      <p:sp>
-        <p:nvSpPr>
-          <p:cNvPr id="4" name="Slide Number Placeholder 3"/>
-          <p:cNvSpPr>
-            <a:spLocks noGrp="1"/>
-          </p:cNvSpPr>
-          <p:nvPr>
-            <p:ph type="sldNum" idx="5" sz="quarter"/>
-          </p:nvPr>
-        </p:nvSpPr>
-        <p:spPr/>
-      </p:sp>
-    </p:spTree>
-  </p:cSld>
-  <p:clrMapOvr>
-    <a:masterClrMapping/>
-  </p:clrMapOvr>
-</p:notes>
-</file>
-
-<file path=ppt/notesSlides/notesSlide8.xml><?xml version="1.0" encoding="utf-8"?>
-<p:notes xmlns:a="http://schemas.openxmlformats.org/drawingml/2006/main" xmlns:p="http://schemas.openxmlformats.org/presentationml/2006/main" xmlns:r="http://schemas.openxmlformats.org/officeDocument/2006/relationships">
-  <p:cSld>
-    <p:spTree>
-      <p:nvGrpSpPr>
-        <p:cNvPr id="1" name=""/>
-        <p:cNvGrpSpPr/>
-        <p:nvPr/>
-      </p:nvGrpSpPr>
-      <p:grpSpPr>
-        <a:xfrm>
-          <a:off x="0" y="0"/>
-          <a:ext cx="0" cy="0"/>
-          <a:chOff x="0" y="0"/>
-          <a:chExt cx="0" cy="0"/>
-        </a:xfrm>
-      </p:grpSpPr>
-      <p:sp>
-        <p:nvSpPr>
-          <p:cNvPr id="2" name="Slide Image Placeholder 1"/>
-          <p:cNvSpPr>
-            <a:spLocks noGrp="1"/>
-          </p:cNvSpPr>
-          <p:nvPr>
-            <p:ph type="sldImg" idx="2"/>
-          </p:nvPr>
-        </p:nvSpPr>
-        <p:spPr/>
-      </p:sp>
-      <p:sp>
-        <p:nvSpPr>
-          <p:cNvPr id="3" name="Notes Placeholder 2"/>
-          <p:cNvSpPr>
-            <a:spLocks noGrp="1"/>
-          </p:cNvSpPr>
-          <p:nvPr>
-            <p:ph type="body" idx="3" sz="quarter"/>
-          </p:nvPr>
-        </p:nvSpPr>
-        <p:spPr/>
-        <p:txBody>
-          <a:bodyPr/>
-          <a:lstStyle/>
-          <a:p>
-            <a:r>
-              <a:t>Show Figure 8 and 9. Point out the distinction between tracemalloc heap allocation and process RSS. Emphasize the flat horizontal line in Figure 9: expanding the key from 32 to 448 bits uses zero extra subkey memory.</a:t>
-            </a:r>
-          </a:p>
-        </p:txBody>
-      </p:sp>
-      <p:sp>
-        <p:nvSpPr>
-          <p:cNvPr id="4" name="Slide Number Placeholder 3"/>
-          <p:cNvSpPr>
-            <a:spLocks noGrp="1"/>
-          </p:cNvSpPr>
-          <p:nvPr>
-            <p:ph type="sldNum" idx="5" sz="quarter"/>
-          </p:nvPr>
-        </p:nvSpPr>
-        <p:spPr/>
-      </p:sp>
-    </p:spTree>
-  </p:cSld>
-  <p:clrMapOvr>
-    <a:masterClrMapping/>
-  </p:clrMapOvr>
-</p:notes>
-</file>
-
-<file path=ppt/notesSlides/notesSlide9.xml><?xml version="1.0" encoding="utf-8"?>
-<p:notes xmlns:a="http://schemas.openxmlformats.org/drawingml/2006/main" xmlns:p="http://schemas.openxmlformats.org/presentationml/2006/main" xmlns:r="http://schemas.openxmlformats.org/officeDocument/2006/relationships">
-  <p:cSld>
-    <p:spTree>
-      <p:nvGrpSpPr>
-        <p:cNvPr id="1" name=""/>
-        <p:cNvGrpSpPr/>
-        <p:nvPr/>
-      </p:nvGrpSpPr>
-      <p:grpSpPr>
-        <a:xfrm>
-          <a:off x="0" y="0"/>
-          <a:ext cx="0" cy="0"/>
-          <a:chOff x="0" y="0"/>
-          <a:chExt cx="0" cy="0"/>
-        </a:xfrm>
-      </p:grpSpPr>
-      <p:sp>
-        <p:nvSpPr>
-          <p:cNvPr id="2" name="Slide Image Placeholder 1"/>
-          <p:cNvSpPr>
-            <a:spLocks noGrp="1"/>
-          </p:cNvSpPr>
-          <p:nvPr>
-            <p:ph type="sldImg" idx="2"/>
-          </p:nvPr>
-        </p:nvSpPr>
-        <p:spPr/>
-      </p:sp>
-      <p:sp>
-        <p:nvSpPr>
-          <p:cNvPr id="3" name="Notes Placeholder 2"/>
-          <p:cNvSpPr>
-            <a:spLocks noGrp="1"/>
-          </p:cNvSpPr>
-          <p:nvPr>
-            <p:ph type="body" idx="3" sz="quarter"/>
-          </p:nvPr>
-        </p:nvSpPr>
-        <p:spPr/>
-        <p:txBody>
-          <a:bodyPr/>
-          <a:lstStyle/>
-          <a:p>
-            <a:r>
-              <a:t>This slide shows academic depth. Faculty always ask: 'If Blowfish is so flexible, why don't we use it everywhere?' Explain the Sweet32 collision attack at 32 GiB due to the 64-bit block size, and explain that CBC requires MAC for authenticity.</a:t>
-            </a:r>
-          </a:p>
-        </p:txBody>
-      </p:sp>
-      <p:sp>
-        <p:nvSpPr>
-          <p:cNvPr id="4" name="Slide Number Placeholder 3"/>
-          <p:cNvSpPr>
-            <a:spLocks noGrp="1"/>
-          </p:cNvSpPr>
-          <p:nvPr>
-            <p:ph type="sldNum" idx="5" sz="quarter"/>
-          </p:nvPr>
-        </p:nvSpPr>
-        <p:spPr/>
-      </p:sp>
-    </p:spTree>
-  </p:cSld>
-  <p:clrMapOvr>
-    <a:masterClrMapping/>
-  </p:clrMapOvr>
-</p:notes>
 </file>
 
 <file path=ppt/slideLayouts/slideLayout1.xml><?xml version="1.0" encoding="utf-8"?>
@@ -4155,8 +3103,8 @@
         </p:nvSpPr>
         <p:spPr>
           <a:xfrm>
-            <a:off x="914400" y="1371600"/>
-            <a:ext cx="7315200" cy="2286000"/>
+            <a:off x="914400" y="1645920"/>
+            <a:ext cx="10332720" cy="4114800"/>
           </a:xfrm>
           <a:prstGeom prst="rect">
             <a:avLst/>
@@ -4169,298 +3117,56 @@
           </a:bodyPr>
           <a:lstStyle/>
           <a:p>
+            <a:pPr algn="l">
+              <a:defRPr sz="3000" b="1">
+                <a:solidFill>
+                  <a:srgbClr val="0B2545"/>
+                </a:solidFill>
+                <a:latin typeface="Arial"/>
+              </a:defRPr>
+            </a:pPr>
+            <a:r>
+              <a:t>Variable Key Length Impacts on Memory Allocation and Throughput in Blowfish Cryptographic Frameworks</a:t>
+            </a:r>
+          </a:p>
+          <a:p>
             <a:pPr>
-              <a:defRPr sz="2800" b="1">
-                <a:solidFill>
-                  <a:srgbClr val="102C57"/>
-                </a:solidFill>
+              <a:spcBef>
+                <a:spcPts val="1400"/>
+              </a:spcBef>
+              <a:defRPr sz="1600">
+                <a:solidFill>
+                  <a:srgbClr val="134074"/>
+                </a:solidFill>
+                <a:latin typeface="Arial"/>
               </a:defRPr>
             </a:pPr>
             <a:r>
-              <a:t>The Flexible Variable-Key Block Cipher Framework</a:t>
+              <a:t>Collaborative R&amp;D Project &amp;bull; Cryptography &amp; Network Security (CNS A.Y. 2026–27)</a:t>
             </a:r>
           </a:p>
           <a:p>
             <a:pPr>
-              <a:defRPr sz="1600" i="1">
-                <a:solidFill>
-                  <a:srgbClr val="355F8E"/>
-                </a:solidFill>
+              <a:spcBef>
+                <a:spcPts val="2000"/>
+              </a:spcBef>
+              <a:defRPr sz="1300">
+                <a:solidFill>
+                  <a:srgbClr val="282828"/>
+                </a:solidFill>
+                <a:latin typeface="Arial"/>
               </a:defRPr>
             </a:pPr>
             <a:r>
-              <a:t>Variable Key Length Impacts on Memory Allocation and Throughput in Blowfish Cryptographic Frameworks</a:t>
-            </a:r>
-          </a:p>
-        </p:txBody>
-      </p:sp>
-      <p:sp>
-        <p:nvSpPr>
-          <p:cNvPr id="3" name="TextBox 2"/>
-          <p:cNvSpPr txBox="1"/>
-          <p:nvPr/>
-        </p:nvSpPr>
-        <p:spPr>
-          <a:xfrm>
-            <a:off x="914400" y="3931920"/>
-            <a:ext cx="7315200" cy="2286000"/>
-          </a:xfrm>
-          <a:prstGeom prst="rect">
-            <a:avLst/>
-          </a:prstGeom>
-          <a:noFill/>
-        </p:spPr>
-        <p:txBody>
-          <a:bodyPr wrap="square">
-            <a:spAutoFit/>
-          </a:bodyPr>
-          <a:lstStyle/>
-          <a:p>
-            <a:pPr>
-              <a:defRPr sz="1300" b="1">
-                <a:solidFill>
-                  <a:srgbClr val="212529"/>
-                </a:solidFill>
-              </a:defRPr>
-            </a:pPr>
-            <a:r>
-              <a:t>Subject: Cryptography &amp; Network Security (CNS) A.Y. 2026–27</a:t>
-            </a:r>
-          </a:p>
-          <a:p>
-            <a:pPr>
-              <a:defRPr sz="1300">
-                <a:solidFill>
-                  <a:srgbClr val="009688"/>
-                </a:solidFill>
-              </a:defRPr>
-            </a:pPr>
-            <a:r>
-              <a:t>Faculty In-Charge: Prof. Renuka Pawar</a:t>
-            </a:r>
-          </a:p>
-          <a:p>
-            <a:pPr>
-              <a:defRPr sz="1200">
-                <a:solidFill>
-                  <a:srgbClr val="6C757D"/>
-                </a:solidFill>
-              </a:defRPr>
-            </a:pPr>
-            <a:r>
-              <a:t>Institution: Sardar Patel Institute of Technology (SPIT), Munshi Nagar, Andheri (W), Mumbai</a:t>
-            </a:r>
-          </a:p>
-        </p:txBody>
-      </p:sp>
-    </p:spTree>
-  </p:cSld>
-  <p:clrMapOvr>
-    <a:masterClrMapping/>
-  </p:clrMapOvr>
-</p:sld>
-</file>
-
-<file path=ppt/slides/slide10.xml><?xml version="1.0" encoding="utf-8"?>
-<p:sld xmlns:a="http://schemas.openxmlformats.org/drawingml/2006/main" xmlns:p="http://schemas.openxmlformats.org/presentationml/2006/main" xmlns:r="http://schemas.openxmlformats.org/officeDocument/2006/relationships">
-  <p:cSld>
-    <p:spTree>
-      <p:nvGrpSpPr>
-        <p:cNvPr id="1" name=""/>
-        <p:cNvGrpSpPr/>
-        <p:nvPr/>
-      </p:nvGrpSpPr>
-      <p:grpSpPr/>
-      <p:sp>
-        <p:nvSpPr>
-          <p:cNvPr id="2" name="TextBox 1"/>
-          <p:cNvSpPr txBox="1"/>
-          <p:nvPr/>
-        </p:nvSpPr>
-        <p:spPr>
-          <a:xfrm>
-            <a:off x="731520" y="365760"/>
-            <a:ext cx="7680960" cy="365760"/>
-          </a:xfrm>
-          <a:prstGeom prst="rect">
-            <a:avLst/>
-          </a:prstGeom>
-          <a:noFill/>
-        </p:spPr>
-        <p:txBody>
-          <a:bodyPr wrap="square">
-            <a:spAutoFit/>
-          </a:bodyPr>
-          <a:lstStyle/>
-          <a:p>
-            <a:pPr>
-              <a:defRPr sz="1000" b="1">
-                <a:solidFill>
-                  <a:srgbClr val="009688"/>
-                </a:solidFill>
-              </a:defRPr>
-            </a:pPr>
-            <a:r>
-              <a:t>SPIT CNS COLLABORATIVE R&amp;D 2026-27</a:t>
-            </a:r>
-          </a:p>
-        </p:txBody>
-      </p:sp>
-      <p:sp>
-        <p:nvSpPr>
-          <p:cNvPr id="3" name="TextBox 2"/>
-          <p:cNvSpPr txBox="1"/>
-          <p:nvPr/>
-        </p:nvSpPr>
-        <p:spPr>
-          <a:xfrm>
-            <a:off x="731520" y="640080"/>
-            <a:ext cx="7680960" cy="731520"/>
-          </a:xfrm>
-          <a:prstGeom prst="rect">
-            <a:avLst/>
-          </a:prstGeom>
-          <a:noFill/>
-        </p:spPr>
-        <p:txBody>
-          <a:bodyPr wrap="square">
-            <a:spAutoFit/>
-          </a:bodyPr>
-          <a:lstStyle/>
-          <a:p>
-            <a:pPr>
-              <a:defRPr sz="2200" b="1">
-                <a:solidFill>
-                  <a:srgbClr val="102C57"/>
-                </a:solidFill>
-              </a:defRPr>
-            </a:pPr>
-            <a:r>
-              <a:t>Conclusions &amp; Institutional Manifest Compliance</a:t>
-            </a:r>
-          </a:p>
-        </p:txBody>
-      </p:sp>
-      <p:sp>
-        <p:nvSpPr>
-          <p:cNvPr id="4" name="TextBox 3"/>
-          <p:cNvSpPr txBox="1"/>
-          <p:nvPr/>
-        </p:nvSpPr>
-        <p:spPr>
-          <a:xfrm>
-            <a:off x="731520" y="1463040"/>
-            <a:ext cx="7680960" cy="4754880"/>
-          </a:xfrm>
-          <a:prstGeom prst="rect">
-            <a:avLst/>
-          </a:prstGeom>
-          <a:noFill/>
-        </p:spPr>
-        <p:txBody>
-          <a:bodyPr wrap="square">
-            <a:spAutoFit/>
-          </a:bodyPr>
-          <a:lstStyle/>
-          <a:p/>
-          <a:p>
-            <a:pPr>
-              <a:defRPr sz="1300" b="1">
-                <a:solidFill>
-                  <a:srgbClr val="102C57"/>
-                </a:solidFill>
-              </a:defRPr>
-            </a:pPr>
-            <a:r>
-              <a:t>• Key Empirical Finding 1: </a:t>
-            </a:r>
-            <a:r>
-              <a:rPr b="0">
-                <a:solidFill>
-                  <a:srgbClr val="212529"/>
-                </a:solidFill>
-              </a:rPr>
-              <a:t>Blowfish cipher initialization is dominated by 521 self-encryptions, rendering secret key length (32 to 448 bits) statistically insignificant in initialization cost.</a:t>
-            </a:r>
-          </a:p>
-          <a:p>
-            <a:pPr>
-              <a:defRPr sz="1300" b="1">
-                <a:solidFill>
-                  <a:srgbClr val="102C57"/>
-                </a:solidFill>
-              </a:defRPr>
-            </a:pPr>
-            <a:r>
-              <a:t>• Key Empirical Finding 2: </a:t>
-            </a:r>
-            <a:r>
-              <a:rPr b="0">
-                <a:solidFill>
-                  <a:srgbClr val="212529"/>
-                </a:solidFill>
-              </a:rPr>
-              <a:t>Steady-state encryption and decryption throughput (~140–190 MiB/s) and memory consumption are completely invariant to secret key length.</a:t>
-            </a:r>
-          </a:p>
-          <a:p>
-            <a:pPr>
-              <a:defRPr sz="1300" b="1">
-                <a:solidFill>
-                  <a:srgbClr val="102C57"/>
-                </a:solidFill>
-              </a:defRPr>
-            </a:pPr>
-            <a:r>
-              <a:t>• Key Empirical Finding 3: </a:t>
-            </a:r>
-            <a:r>
-              <a:rPr b="0">
-                <a:solidFill>
-                  <a:srgbClr val="212529"/>
-                </a:solidFill>
-              </a:rPr>
-              <a:t>Throughput is governed by workload payload size, amortizing invocation overhead beyond 100 KiB.</a:t>
-            </a:r>
-          </a:p>
-          <a:p>
-            <a:pPr>
-              <a:defRPr sz="1300" b="1">
-                <a:solidFill>
-                  <a:srgbClr val="102C57"/>
-                </a:solidFill>
-              </a:defRPr>
-            </a:pPr>
-            <a:r>
-              <a:t>• SPIT Collaborative R&amp;D Compliance: </a:t>
-            </a:r>
-            <a:r>
-              <a:rPr b="0">
-                <a:solidFill>
-                  <a:srgbClr val="212529"/>
-                </a:solidFill>
-              </a:rPr>
-              <a:t>Successfully executed all 4 milestones: Week 1 Data Lock, Week 2 Parameter Sweeps, Week 3 Tournament Sync (1,820 trials), and Week 4 Overleaf/IEEE Manuscript.</a:t>
-            </a:r>
-          </a:p>
-          <a:p>
-            <a:pPr>
-              <a:defRPr sz="1300" b="1">
-                <a:solidFill>
-                  <a:srgbClr val="102C57"/>
-                </a:solidFill>
-              </a:defRPr>
-            </a:pPr>
-            <a:r>
-              <a:t>• Complete Deliverables Package: </a:t>
-            </a:r>
-            <a:r>
-              <a:rPr b="0">
-                <a:solidFill>
-                  <a:srgbClr val="212529"/>
-                </a:solidFill>
-              </a:rPr>
-              <a:t>Main Python engine, raw CSVs, summary CSVs, 12 IEEE 300 DPI figures, full IEEEtran LaTeX paper, and automated test suite.</a:t>
+              <a:t>Student Researcher: Rutuja Hirudkar (UID: 2026-CNS-030)</a:t>
+            </a:r>
+            <a:br/>
+            <a:r>
+              <a:t>Academic Supervisor: Prof. Renuka Pawar</a:t>
+            </a:r>
+            <a:br/>
+            <a:r>
+              <a:t>Institution: Sardar Patel Institute of Technology (SPIT), Mumbai</a:t>
             </a:r>
           </a:p>
         </p:txBody>
@@ -4492,7 +3198,7 @@
         <p:spPr>
           <a:xfrm>
             <a:off x="731520" y="365760"/>
-            <a:ext cx="7680960" cy="365760"/>
+            <a:ext cx="10698480" cy="1005840"/>
           </a:xfrm>
           <a:prstGeom prst="rect">
             <a:avLst/>
@@ -4508,12 +3214,26 @@
             <a:pPr>
               <a:defRPr sz="1000" b="1">
                 <a:solidFill>
-                  <a:srgbClr val="009688"/>
-                </a:solidFill>
+                  <a:srgbClr val="0096D6"/>
+                </a:solidFill>
+                <a:latin typeface="Arial"/>
               </a:defRPr>
             </a:pPr>
             <a:r>
-              <a:t>SPIT CNS COLLABORATIVE R&amp;D 2026-27</a:t>
+              <a:t>CNS RESEARCH DEFENSE &amp;BULL; A.Y. 2026–27</a:t>
+            </a:r>
+          </a:p>
+          <a:p>
+            <a:pPr>
+              <a:defRPr sz="2200" b="1">
+                <a:solidFill>
+                  <a:srgbClr val="0B2545"/>
+                </a:solidFill>
+                <a:latin typeface="Arial"/>
+              </a:defRPr>
+            </a:pPr>
+            <a:r>
+              <a:t>Research Motivation &amp; Empirical Problem Statement</a:t>
             </a:r>
           </a:p>
         </p:txBody>
@@ -4526,8 +3246,8 @@
         </p:nvSpPr>
         <p:spPr>
           <a:xfrm>
-            <a:off x="731520" y="640080"/>
-            <a:ext cx="7680960" cy="731520"/>
+            <a:off x="731520" y="1463040"/>
+            <a:ext cx="10698480" cy="4754880"/>
           </a:xfrm>
           <a:prstGeom prst="rect">
             <a:avLst/>
@@ -4541,118 +3261,117 @@
           <a:lstStyle/>
           <a:p>
             <a:pPr>
-              <a:defRPr sz="2200" b="1">
-                <a:solidFill>
-                  <a:srgbClr val="102C57"/>
+              <a:spcBef>
+                <a:spcPts val="1000"/>
+              </a:spcBef>
+              <a:defRPr b="1" sz="1400">
+                <a:solidFill>
+                  <a:srgbClr val="0B2545"/>
                 </a:solidFill>
               </a:defRPr>
             </a:pPr>
             <a:r>
-              <a:t>Problem Statement &amp; Research Motivation</a:t>
-            </a:r>
-          </a:p>
-        </p:txBody>
-      </p:sp>
-      <p:sp>
-        <p:nvSpPr>
-          <p:cNvPr id="4" name="TextBox 3"/>
-          <p:cNvSpPr txBox="1"/>
-          <p:nvPr/>
-        </p:nvSpPr>
-        <p:spPr>
-          <a:xfrm>
-            <a:off x="731520" y="1463040"/>
-            <a:ext cx="7680960" cy="4754880"/>
-          </a:xfrm>
-          <a:prstGeom prst="rect">
-            <a:avLst/>
-          </a:prstGeom>
-          <a:noFill/>
-        </p:spPr>
-        <p:txBody>
-          <a:bodyPr wrap="square">
-            <a:spAutoFit/>
-          </a:bodyPr>
-          <a:lstStyle/>
-          <a:p/>
+              <a:t>The Variable-Key Block Cipher Paradigm: </a:t>
+            </a:r>
+            <a:r>
+              <a:rPr b="0">
+                <a:solidFill>
+                  <a:srgbClr val="282828"/>
+                </a:solidFill>
+              </a:rPr>
+              <a:t>Bruce Schneier designed Blowfish (1993) supporting flexible keys from 32 to 448 bits in 32-bit increments.</a:t>
+            </a:r>
+          </a:p>
           <a:p>
             <a:pPr>
-              <a:defRPr sz="1300" b="1">
-                <a:solidFill>
-                  <a:srgbClr val="102C57"/>
+              <a:spcBef>
+                <a:spcPts val="1000"/>
+              </a:spcBef>
+              <a:defRPr b="1" sz="1400">
+                <a:solidFill>
+                  <a:srgbClr val="0B2545"/>
                 </a:solidFill>
               </a:defRPr>
             </a:pPr>
             <a:r>
-              <a:t>• The Rigid Key Paradigm: </a:t>
+              <a:t>The Common Architectural Misconception: </a:t>
             </a:r>
             <a:r>
               <a:rPr b="0">
                 <a:solidFill>
-                  <a:srgbClr val="212529"/>
+                  <a:srgbClr val="282828"/>
                 </a:solidFill>
               </a:rPr>
-              <a:t>Modern standards like AES mandate fixed key sizes (128, 192, 256 bits). In contrast, Bruce Schneier's Blowfish (1993) introduced a flexible variable key mechanism supporting 32 to 448 bits.</a:t>
+              <a:t>Practitioners often assume that 448-bit keys incur higher runtime memory overhead and lower steady-state encryption throughput than 32-bit or 128-bit keys.</a:t>
             </a:r>
           </a:p>
           <a:p>
             <a:pPr>
-              <a:defRPr sz="1300" b="1">
-                <a:solidFill>
-                  <a:srgbClr val="102C57"/>
+              <a:spcBef>
+                <a:spcPts val="1000"/>
+              </a:spcBef>
+              <a:defRPr b="1" sz="1400">
+                <a:solidFill>
+                  <a:srgbClr val="0B2545"/>
                 </a:solidFill>
               </a:defRPr>
             </a:pPr>
             <a:r>
-              <a:t>• Real-World Deployment Landscape: </a:t>
+              <a:t>The Research Gap: </a:t>
             </a:r>
             <a:r>
               <a:rPr b="0">
                 <a:solidFill>
-                  <a:srgbClr val="212529"/>
+                  <a:srgbClr val="282828"/>
                 </a:solidFill>
               </a:rPr>
-              <a:t>Blowfish remains actively utilized in OpenVPN tunnels, disk encryption, legacy SSH, and the ubiquitous bcrypt password hashing algorithm.</a:t>
+              <a:t>Rigorous empirical profiling separating theoretical algorithmic subkeys, Python runtime heap (tracemalloc), and OS process RSS has been lacking.</a:t>
             </a:r>
           </a:p>
           <a:p>
             <a:pPr>
-              <a:defRPr sz="1300" b="1">
-                <a:solidFill>
-                  <a:srgbClr val="102C57"/>
+              <a:spcBef>
+                <a:spcPts val="1000"/>
+              </a:spcBef>
+              <a:defRPr b="1" sz="1400">
+                <a:solidFill>
+                  <a:srgbClr val="0B2545"/>
                 </a:solidFill>
               </a:defRPr>
             </a:pPr>
             <a:r>
-              <a:t>• The Empirical Research Gap: </a:t>
+              <a:t>SPIT Collaborative R&amp;D Framework: </a:t>
             </a:r>
             <a:r>
               <a:rPr b="0">
                 <a:solidFill>
-                  <a:srgbClr val="212529"/>
+                  <a:srgbClr val="282828"/>
                 </a:solidFill>
               </a:rPr>
-              <a:t>While cryptanalytic robustness against differential attacks is well-documented, experimental benchmarks quantifying how variable key sizes affect cipher initialization latency, steady-state throughput, and memory consumption are largely missing or anecdotal.</a:t>
+              <a:t>Comprehensive four-phase experimental investigation: Phase 1 Data Lock, Phase 2 Local Tuning, Phase 3 Tournament Benchmark, and Phase 4 Publication Compilation.</a:t>
             </a:r>
           </a:p>
           <a:p>
             <a:pPr>
-              <a:defRPr sz="1300" b="1">
-                <a:solidFill>
-                  <a:srgbClr val="102C57"/>
+              <a:spcBef>
+                <a:spcPts val="1000"/>
+              </a:spcBef>
+              <a:defRPr b="1" sz="1400">
+                <a:solidFill>
+                  <a:srgbClr val="0B2545"/>
                 </a:solidFill>
               </a:defRPr>
             </a:pPr>
             <a:r>
-              <a:t>• Project Objective: </a:t>
+              <a:t>Core Finding Preview: </a:t>
             </a:r>
             <a:r>
               <a:rPr b="0">
                 <a:solidFill>
-                  <a:srgbClr val="212529"/>
+                  <a:srgbClr val="282828"/>
                 </a:solidFill>
               </a:rPr>
-              <a:t>Build a rigorous, reproducible benchmarking framework using PyCryptodome to experimentally measure initialization latency, encryption/decryption throughput, and memory allocation across all 14 standard key sizes.</a:t>
+              <a:t>Empirical audit proves that throughput and memory are 100% invariant to key length once steady-state is attained; cold-start artifacts must be isolated via warm-ups.</a:t>
             </a:r>
           </a:p>
         </p:txBody>
@@ -4684,7 +3403,7 @@
         <p:spPr>
           <a:xfrm>
             <a:off x="731520" y="365760"/>
-            <a:ext cx="7680960" cy="365760"/>
+            <a:ext cx="10698480" cy="1005840"/>
           </a:xfrm>
           <a:prstGeom prst="rect">
             <a:avLst/>
@@ -4700,12 +3419,26 @@
             <a:pPr>
               <a:defRPr sz="1000" b="1">
                 <a:solidFill>
-                  <a:srgbClr val="009688"/>
-                </a:solidFill>
+                  <a:srgbClr val="0096D6"/>
+                </a:solidFill>
+                <a:latin typeface="Arial"/>
               </a:defRPr>
             </a:pPr>
             <a:r>
-              <a:t>SPIT CNS COLLABORATIVE R&amp;D 2026-27</a:t>
+              <a:t>CNS RESEARCH DEFENSE &amp;BULL; A.Y. 2026–27</a:t>
+            </a:r>
+          </a:p>
+          <a:p>
+            <a:pPr>
+              <a:defRPr sz="2200" b="1">
+                <a:solidFill>
+                  <a:srgbClr val="0B2545"/>
+                </a:solidFill>
+                <a:latin typeface="Arial"/>
+              </a:defRPr>
+            </a:pPr>
+            <a:r>
+              <a:t>Theoretical Foundation: Why Blowfish Is Key-Invariant</a:t>
             </a:r>
           </a:p>
         </p:txBody>
@@ -4718,8 +3451,8 @@
         </p:nvSpPr>
         <p:spPr>
           <a:xfrm>
-            <a:off x="731520" y="640080"/>
-            <a:ext cx="7680960" cy="731520"/>
+            <a:off x="731520" y="1463040"/>
+            <a:ext cx="5486400" cy="4754880"/>
           </a:xfrm>
           <a:prstGeom prst="rect">
             <a:avLst/>
@@ -4733,142 +3466,122 @@
           <a:lstStyle/>
           <a:p>
             <a:pPr>
-              <a:defRPr sz="2200" b="1">
-                <a:solidFill>
-                  <a:srgbClr val="102C57"/>
+              <a:spcBef>
+                <a:spcPts val="800"/>
+              </a:spcBef>
+              <a:defRPr b="1" sz="1300">
+                <a:solidFill>
+                  <a:srgbClr val="0B2545"/>
                 </a:solidFill>
               </a:defRPr>
             </a:pPr>
             <a:r>
-              <a:t>Blowfish Architecture &amp; Subkey Generation Mechanics</a:t>
-            </a:r>
-          </a:p>
-        </p:txBody>
-      </p:sp>
-      <p:sp>
-        <p:nvSpPr>
-          <p:cNvPr id="4" name="TextBox 3"/>
-          <p:cNvSpPr txBox="1"/>
+              <a:t>16-Round Feistel Structure: </a:t>
+            </a:r>
+            <a:r>
+              <a:rPr b="0">
+                <a:solidFill>
+                  <a:srgbClr val="282828"/>
+                </a:solidFill>
+              </a:rPr>
+              <a:t>Every 64-bit plaintext block undergoes exactly 16 Feistel rounds: L_i = R_{i-1}, R_i = L_{i-1} ^ F(R_{i-1}) ^ P_i.</a:t>
+            </a:r>
+          </a:p>
+          <a:p>
+            <a:pPr>
+              <a:spcBef>
+                <a:spcPts val="800"/>
+              </a:spcBef>
+              <a:defRPr b="1" sz="1300">
+                <a:solidFill>
+                  <a:srgbClr val="0B2545"/>
+                </a:solidFill>
+              </a:defRPr>
+            </a:pPr>
+            <a:r>
+              <a:t>Fixed S-Box &amp; P-Array State: </a:t>
+            </a:r>
+            <a:r>
+              <a:rPr b="0">
+                <a:solidFill>
+                  <a:srgbClr val="282828"/>
+                </a:solidFill>
+              </a:rPr>
+              <a:t>Four 256x32-bit S-boxes (4,096 bytes) and one 18x32-bit P-array (72 bytes). Total internal subkey storage = exactly 4,168 bytes.</a:t>
+            </a:r>
+          </a:p>
+          <a:p>
+            <a:pPr>
+              <a:spcBef>
+                <a:spcPts val="800"/>
+              </a:spcBef>
+              <a:defRPr b="1" sz="1300">
+                <a:solidFill>
+                  <a:srgbClr val="0B2545"/>
+                </a:solidFill>
+              </a:defRPr>
+            </a:pPr>
+            <a:r>
+              <a:t>Constant Key Expansion Cost: </a:t>
+            </a:r>
+            <a:r>
+              <a:rPr b="0">
+                <a:solidFill>
+                  <a:srgbClr val="282828"/>
+                </a:solidFill>
+              </a:rPr>
+              <a:t>Subkeys are populated by iteratively encrypting an all-zero block exactly 521 times using fractional digits of pi.</a:t>
+            </a:r>
+          </a:p>
+          <a:p>
+            <a:pPr>
+              <a:spcBef>
+                <a:spcPts val="800"/>
+              </a:spcBef>
+              <a:defRPr b="1" sz="1300">
+                <a:solidFill>
+                  <a:srgbClr val="0B2545"/>
+                </a:solidFill>
+              </a:defRPr>
+            </a:pPr>
+            <a:r>
+              <a:t>Mathematical Invariance: </a:t>
+            </a:r>
+            <a:r>
+              <a:rPr b="0">
+                <a:solidFill>
+                  <a:srgbClr val="282828"/>
+                </a:solidFill>
+              </a:rPr>
+              <a:t>Whether key is 32 bits (4 B) or 448 bits (56 B), exactly 521 encryptions are run and exactly 4,168 bytes are populated.</a:t>
+            </a:r>
+          </a:p>
+        </p:txBody>
+      </p:sp>
+      <p:pic>
+        <p:nvPicPr>
+          <p:cNvPr id="4" name="Picture 3" descr="fig09_memory_vs_key_length.png"/>
+          <p:cNvPicPr>
+            <a:picLocks noChangeAspect="1"/>
+          </p:cNvPicPr>
           <p:nvPr/>
-        </p:nvSpPr>
+        </p:nvPicPr>
+        <p:blipFill>
+          <a:blip r:embed="rId2"/>
+          <a:stretch>
+            <a:fillRect/>
+          </a:stretch>
+        </p:blipFill>
         <p:spPr>
           <a:xfrm>
-            <a:off x="731520" y="1463040"/>
-            <a:ext cx="7680960" cy="4754880"/>
+            <a:off x="6400800" y="1645920"/>
+            <a:ext cx="5029200" cy="1927795"/>
           </a:xfrm>
           <a:prstGeom prst="rect">
             <a:avLst/>
           </a:prstGeom>
-          <a:noFill/>
         </p:spPr>
-        <p:txBody>
-          <a:bodyPr wrap="square">
-            <a:spAutoFit/>
-          </a:bodyPr>
-          <a:lstStyle/>
-          <a:p/>
-          <a:p>
-            <a:pPr>
-              <a:defRPr sz="1300" b="1">
-                <a:solidFill>
-                  <a:srgbClr val="102C57"/>
-                </a:solidFill>
-              </a:defRPr>
-            </a:pPr>
-            <a:r>
-              <a:t>• Feistel Network Topology: </a:t>
-            </a:r>
-            <a:r>
-              <a:rPr b="0">
-                <a:solidFill>
-                  <a:srgbClr val="212529"/>
-                </a:solidFill>
-              </a:rPr>
-              <a:t>16-round symmetric Feistel network operating on 64-bit plaintext blocks split into 32-bit left (L) and right (R) halves.</a:t>
-            </a:r>
-          </a:p>
-          <a:p>
-            <a:pPr>
-              <a:defRPr sz="1300" b="1">
-                <a:solidFill>
-                  <a:srgbClr val="102C57"/>
-                </a:solidFill>
-              </a:defRPr>
-            </a:pPr>
-            <a:r>
-              <a:t>• Non-Linear Round Function F: </a:t>
-            </a:r>
-            <a:r>
-              <a:rPr b="0">
-                <a:solidFill>
-                  <a:srgbClr val="212529"/>
-                </a:solidFill>
-              </a:rPr>
-              <a:t>F(x) partitions 32-bit input into four 8-bit bytes, accesses four 256-entry S-boxes, and combines them via modulo 2^32 addition and XOR.</a:t>
-            </a:r>
-          </a:p>
-          <a:p>
-            <a:pPr>
-              <a:defRPr sz="1300" b="1">
-                <a:solidFill>
-                  <a:srgbClr val="102C57"/>
-                </a:solidFill>
-              </a:defRPr>
-            </a:pPr>
-            <a:r>
-              <a:t>• P-Array and S-Box Initialization: </a:t>
-            </a:r>
-            <a:r>
-              <a:rPr b="0">
-                <a:solidFill>
-                  <a:srgbClr val="212529"/>
-                </a:solidFill>
-              </a:rPr>
-              <a:t>18 P-array entries (P1..P18) and four S-boxes (4x256 entries) are initially seeded with the fractional hexadecimal digits of pi.</a:t>
-            </a:r>
-          </a:p>
-          <a:p>
-            <a:pPr>
-              <a:defRPr sz="1300" b="1">
-                <a:solidFill>
-                  <a:srgbClr val="102C57"/>
-                </a:solidFill>
-              </a:defRPr>
-            </a:pPr>
-            <a:r>
-              <a:t>• Subkey Expansion Cycle: </a:t>
-            </a:r>
-            <a:r>
-              <a:rPr b="0">
-                <a:solidFill>
-                  <a:srgbClr val="212529"/>
-                </a:solidFill>
-              </a:rPr>
-              <a:t>User key bytes (32-448 bits) are cyclically XORed into the P-array. Then, exactly 521 iterative block encryptions are performed using Blowfish itself to generate the final subkeys.</a:t>
-            </a:r>
-          </a:p>
-          <a:p>
-            <a:pPr>
-              <a:defRPr sz="1300" b="1">
-                <a:solidFill>
-                  <a:srgbClr val="102C57"/>
-                </a:solidFill>
-              </a:defRPr>
-            </a:pPr>
-            <a:r>
-              <a:t>• Architectural Invariance Implication: </a:t>
-            </a:r>
-            <a:r>
-              <a:rPr b="0">
-                <a:solidFill>
-                  <a:srgbClr val="212529"/>
-                </a:solidFill>
-              </a:rPr>
-              <a:t>Because exactly 521 encryptions are required regardless of key length, expanded subkeys consume fixed storage (4,168 bytes), hypothesizing key-length invariance!</a:t>
-            </a:r>
-          </a:p>
-        </p:txBody>
-      </p:sp>
+      </p:pic>
     </p:spTree>
   </p:cSld>
   <p:clrMapOvr>
@@ -4896,7 +3609,7 @@
         <p:spPr>
           <a:xfrm>
             <a:off x="731520" y="365760"/>
-            <a:ext cx="7680960" cy="365760"/>
+            <a:ext cx="10698480" cy="1005840"/>
           </a:xfrm>
           <a:prstGeom prst="rect">
             <a:avLst/>
@@ -4912,12 +3625,26 @@
             <a:pPr>
               <a:defRPr sz="1000" b="1">
                 <a:solidFill>
-                  <a:srgbClr val="009688"/>
-                </a:solidFill>
+                  <a:srgbClr val="0096D6"/>
+                </a:solidFill>
+                <a:latin typeface="Arial"/>
               </a:defRPr>
             </a:pPr>
             <a:r>
-              <a:t>SPIT CNS COLLABORATIVE R&amp;D 2026-27</a:t>
+              <a:t>CNS RESEARCH DEFENSE &amp;BULL; A.Y. 2026–27</a:t>
+            </a:r>
+          </a:p>
+          <a:p>
+            <a:pPr>
+              <a:defRPr sz="2200" b="1">
+                <a:solidFill>
+                  <a:srgbClr val="0B2545"/>
+                </a:solidFill>
+                <a:latin typeface="Arial"/>
+              </a:defRPr>
+            </a:pPr>
+            <a:r>
+              <a:t>Key Schedule Latency Audit: Resolving Cold-Start Artifact</a:t>
             </a:r>
           </a:p>
         </p:txBody>
@@ -4930,8 +3657,8 @@
         </p:nvSpPr>
         <p:spPr>
           <a:xfrm>
-            <a:off x="731520" y="640080"/>
-            <a:ext cx="7680960" cy="731520"/>
+            <a:off x="731520" y="1463040"/>
+            <a:ext cx="5303520" cy="4754880"/>
           </a:xfrm>
           <a:prstGeom prst="rect">
             <a:avLst/>
@@ -4945,142 +3672,122 @@
           <a:lstStyle/>
           <a:p>
             <a:pPr>
-              <a:defRPr sz="2200" b="1">
-                <a:solidFill>
-                  <a:srgbClr val="102C57"/>
+              <a:spcBef>
+                <a:spcPts val="800"/>
+              </a:spcBef>
+              <a:defRPr b="1" sz="1300">
+                <a:solidFill>
+                  <a:srgbClr val="0B2545"/>
                 </a:solidFill>
               </a:defRPr>
             </a:pPr>
             <a:r>
-              <a:t>Formulated Research Questions &amp; Hypotheses</a:t>
-            </a:r>
-          </a:p>
-        </p:txBody>
-      </p:sp>
-      <p:sp>
-        <p:nvSpPr>
-          <p:cNvPr id="4" name="TextBox 3"/>
-          <p:cNvSpPr txBox="1"/>
+              <a:t>The Cold-Start Anomaly: </a:t>
+            </a:r>
+            <a:r>
+              <a:rPr b="0">
+                <a:solidFill>
+                  <a:srgbClr val="282828"/>
+                </a:solidFill>
+              </a:rPr>
+              <a:t>The un-warmed first 32-bit key measurement registered 7.8774 ms, while subsequent repetitions registered ~0.08 ms (skewing mean to 0.362 ms and CV to 392%).</a:t>
+            </a:r>
+          </a:p>
+          <a:p>
+            <a:pPr>
+              <a:spcBef>
+                <a:spcPts val="800"/>
+              </a:spcBef>
+              <a:defRPr b="1" sz="1300">
+                <a:solidFill>
+                  <a:srgbClr val="0B2545"/>
+                </a:solidFill>
+              </a:defRPr>
+            </a:pPr>
+            <a:r>
+              <a:t>Root Cause Identified: </a:t>
+            </a:r>
+            <a:r>
+              <a:rPr b="0">
+                <a:solidFill>
+                  <a:srgbClr val="282828"/>
+                </a:solidFill>
+              </a:rPr>
+              <a:t>First invocation forced dynamic linking of the PyCryptodome C extension DLL and initial OS page fault allocations into CPU cache.</a:t>
+            </a:r>
+          </a:p>
+          <a:p>
+            <a:pPr>
+              <a:spcBef>
+                <a:spcPts val="800"/>
+              </a:spcBef>
+              <a:defRPr b="1" sz="1300">
+                <a:solidFill>
+                  <a:srgbClr val="0B2545"/>
+                </a:solidFill>
+              </a:defRPr>
+            </a:pPr>
+            <a:r>
+              <a:t>Audited Warm-Up Policy: </a:t>
+            </a:r>
+            <a:r>
+              <a:rPr b="0">
+                <a:solidFill>
+                  <a:srgbClr val="282828"/>
+                </a:solidFill>
+              </a:rPr>
+              <a:t>Implemented a 5-iteration warm-up policy (flagged is_warmup=True), isolating cold starts from steady-state evaluations.</a:t>
+            </a:r>
+          </a:p>
+          <a:p>
+            <a:pPr>
+              <a:spcBef>
+                <a:spcPts val="800"/>
+              </a:spcBef>
+              <a:defRPr b="1" sz="1300">
+                <a:solidFill>
+                  <a:srgbClr val="0B2545"/>
+                </a:solidFill>
+              </a:defRPr>
+            </a:pPr>
+            <a:r>
+              <a:t>Verified Outcome: </a:t>
+            </a:r>
+            <a:r>
+              <a:rPr b="0">
+                <a:solidFill>
+                  <a:srgbClr val="282828"/>
+                </a:solidFill>
+              </a:rPr>
+              <a:t>Audited 32-bit initialization latency dropped to 0.0896 ms (CV: 33.7%), fully aligned with all other 13 key sizes (0.056–0.162 ms).</a:t>
+            </a:r>
+          </a:p>
+        </p:txBody>
+      </p:sp>
+      <p:pic>
+        <p:nvPicPr>
+          <p:cNvPr id="4" name="Picture 3" descr="fig01_key_vs_init_time.png"/>
+          <p:cNvPicPr>
+            <a:picLocks noChangeAspect="1"/>
+          </p:cNvPicPr>
           <p:nvPr/>
-        </p:nvSpPr>
+        </p:nvPicPr>
+        <p:blipFill>
+          <a:blip r:embed="rId2"/>
+          <a:stretch>
+            <a:fillRect/>
+          </a:stretch>
+        </p:blipFill>
         <p:spPr>
           <a:xfrm>
-            <a:off x="731520" y="1463040"/>
-            <a:ext cx="7680960" cy="4754880"/>
+            <a:off x="6217920" y="1645920"/>
+            <a:ext cx="5303520" cy="3085800"/>
           </a:xfrm>
           <a:prstGeom prst="rect">
             <a:avLst/>
           </a:prstGeom>
-          <a:noFill/>
         </p:spPr>
-        <p:txBody>
-          <a:bodyPr wrap="square">
-            <a:spAutoFit/>
-          </a:bodyPr>
-          <a:lstStyle/>
-          <a:p/>
-          <a:p>
-            <a:pPr>
-              <a:defRPr sz="1300" b="1">
-                <a:solidFill>
-                  <a:srgbClr val="102C57"/>
-                </a:solidFill>
-              </a:defRPr>
-            </a:pPr>
-            <a:r>
-              <a:t>• Hypothesis H1 (Key Schedule Latency): </a:t>
-            </a:r>
-            <a:r>
-              <a:rPr b="0">
-                <a:solidFill>
-                  <a:srgbClr val="212529"/>
-                </a:solidFill>
-              </a:rPr>
-              <a:t>Does secret key length measurably scale cipher initialization time? (Expected: Minimal or statistically undetectable effect due to 521 self-encryptions dominating).</a:t>
-            </a:r>
-          </a:p>
-          <a:p>
-            <a:pPr>
-              <a:defRPr sz="1300" b="1">
-                <a:solidFill>
-                  <a:srgbClr val="102C57"/>
-                </a:solidFill>
-              </a:defRPr>
-            </a:pPr>
-            <a:r>
-              <a:t>• Hypothesis H2 (Steady-State Throughput): </a:t>
-            </a:r>
-            <a:r>
-              <a:rPr b="0">
-                <a:solidFill>
-                  <a:srgbClr val="212529"/>
-                </a:solidFill>
-              </a:rPr>
-              <a:t>Does secret key length alter steady-state block processing throughput? (Expected: Strict invariance once subkeys are expanded into registers).</a:t>
-            </a:r>
-          </a:p>
-          <a:p>
-            <a:pPr>
-              <a:defRPr sz="1300" b="1">
-                <a:solidFill>
-                  <a:srgbClr val="102C57"/>
-                </a:solidFill>
-              </a:defRPr>
-            </a:pPr>
-            <a:r>
-              <a:t>• Hypothesis H3 (Workload Amortization): </a:t>
-            </a:r>
-            <a:r>
-              <a:rPr b="0">
-                <a:solidFill>
-                  <a:srgbClr val="212529"/>
-                </a:solidFill>
-              </a:rPr>
-              <a:t>How does input file size govern throughput and latency? (Expected: Initial steep amortization curve plateauing around 1 MiB; latency scales strictly O(N)).</a:t>
-            </a:r>
-          </a:p>
-          <a:p>
-            <a:pPr>
-              <a:defRPr sz="1300" b="1">
-                <a:solidFill>
-                  <a:srgbClr val="102C57"/>
-                </a:solidFill>
-              </a:defRPr>
-            </a:pPr>
-            <a:r>
-              <a:t>• Hypothesis H4 (Memory Consumption): </a:t>
-            </a:r>
-            <a:r>
-              <a:rPr b="0">
-                <a:solidFill>
-                  <a:srgbClr val="212529"/>
-                </a:solidFill>
-              </a:rPr>
-              <a:t>Does memory consumption scale with key length or payload size? (Expected: Memory scales with payload buffers but remains completely invariant to key length).</a:t>
-            </a:r>
-          </a:p>
-          <a:p>
-            <a:pPr>
-              <a:defRPr sz="1300" b="1">
-                <a:solidFill>
-                  <a:srgbClr val="102C57"/>
-                </a:solidFill>
-              </a:defRPr>
-            </a:pPr>
-            <a:r>
-              <a:t>• Hypothesis H5 (Statistical Significance vs. Jitter): </a:t>
-            </a:r>
-            <a:r>
-              <a:rPr b="0">
-                <a:solidFill>
-                  <a:srgbClr val="212529"/>
-                </a:solidFill>
-              </a:rPr>
-              <a:t>Are observed microsecond fluctuations attributable to algorithmic causes or operating system scheduling noise? (Investigated via ANOVA and regression).</a:t>
-            </a:r>
-          </a:p>
-        </p:txBody>
-      </p:sp>
+      </p:pic>
     </p:spTree>
   </p:cSld>
   <p:clrMapOvr>
@@ -5108,7 +3815,7 @@
         <p:spPr>
           <a:xfrm>
             <a:off x="731520" y="365760"/>
-            <a:ext cx="7680960" cy="365760"/>
+            <a:ext cx="10698480" cy="1005840"/>
           </a:xfrm>
           <a:prstGeom prst="rect">
             <a:avLst/>
@@ -5124,12 +3831,26 @@
             <a:pPr>
               <a:defRPr sz="1000" b="1">
                 <a:solidFill>
-                  <a:srgbClr val="009688"/>
-                </a:solidFill>
+                  <a:srgbClr val="0096D6"/>
+                </a:solidFill>
+                <a:latin typeface="Arial"/>
               </a:defRPr>
             </a:pPr>
             <a:r>
-              <a:t>SPIT CNS COLLABORATIVE R&amp;D 2026-27</a:t>
+              <a:t>CNS RESEARCH DEFENSE &amp;BULL; A.Y. 2026–27</a:t>
+            </a:r>
+          </a:p>
+          <a:p>
+            <a:pPr>
+              <a:defRPr sz="2200" b="1">
+                <a:solidFill>
+                  <a:srgbClr val="0B2545"/>
+                </a:solidFill>
+                <a:latin typeface="Arial"/>
+              </a:defRPr>
+            </a:pPr>
+            <a:r>
+              <a:t>Steady-State Throughput Across All Five Workloads</a:t>
             </a:r>
           </a:p>
         </p:txBody>
@@ -5142,8 +3863,8 @@
         </p:nvSpPr>
         <p:spPr>
           <a:xfrm>
-            <a:off x="731520" y="640080"/>
-            <a:ext cx="7680960" cy="731520"/>
+            <a:off x="731520" y="1463040"/>
+            <a:ext cx="5303520" cy="4754880"/>
           </a:xfrm>
           <a:prstGeom prst="rect">
             <a:avLst/>
@@ -5157,142 +3878,122 @@
           <a:lstStyle/>
           <a:p>
             <a:pPr>
-              <a:defRPr sz="2200" b="1">
-                <a:solidFill>
-                  <a:srgbClr val="102C57"/>
+              <a:spcBef>
+                <a:spcPts val="800"/>
+              </a:spcBef>
+              <a:defRPr b="1" sz="1300">
+                <a:solidFill>
+                  <a:srgbClr val="0B2545"/>
                 </a:solidFill>
               </a:defRPr>
             </a:pPr>
             <a:r>
-              <a:t>Experimental Setup &amp; Factorial Benchmark Matrix</a:t>
-            </a:r>
-          </a:p>
-        </p:txBody>
-      </p:sp>
-      <p:sp>
-        <p:nvSpPr>
-          <p:cNvPr id="4" name="TextBox 3"/>
-          <p:cNvSpPr txBox="1"/>
+              <a:t>Factorial Parameter Grid: </a:t>
+            </a:r>
+            <a:r>
+              <a:rPr b="0">
+                <a:solidFill>
+                  <a:srgbClr val="282828"/>
+                </a:solidFill>
+              </a:rPr>
+              <a:t>14 key sizes x 5 workloads (1 KiB, 100 KiB, 1 MiB, 10 MiB, 50 MiB) across 1,820 individual trials.</a:t>
+            </a:r>
+          </a:p>
+          <a:p>
+            <a:pPr>
+              <a:spcBef>
+                <a:spcPts val="800"/>
+              </a:spcBef>
+              <a:defRPr b="1" sz="1300">
+                <a:solidFill>
+                  <a:srgbClr val="0B2545"/>
+                </a:solidFill>
+              </a:defRPr>
+            </a:pPr>
+            <a:r>
+              <a:t>Amortization Curve: </a:t>
+            </a:r>
+            <a:r>
+              <a:rPr b="0">
+                <a:solidFill>
+                  <a:srgbClr val="282828"/>
+                </a:solidFill>
+              </a:rPr>
+              <a:t>1 KiB achieves ~6.3–15.9 MiB/s due to function call dispatch. 100 KiB surges to 371–702 MiB/s fitting entirely in CPU cache.</a:t>
+            </a:r>
+          </a:p>
+          <a:p>
+            <a:pPr>
+              <a:spcBef>
+                <a:spcPts val="800"/>
+              </a:spcBef>
+              <a:defRPr b="1" sz="1300">
+                <a:solidFill>
+                  <a:srgbClr val="0B2545"/>
+                </a:solidFill>
+              </a:defRPr>
+            </a:pPr>
+            <a:r>
+              <a:t>Steady-State Saturation: </a:t>
+            </a:r>
+            <a:r>
+              <a:rPr b="0">
+                <a:solidFill>
+                  <a:srgbClr val="282828"/>
+                </a:solidFill>
+              </a:rPr>
+              <a:t>10 MiB and 50 MiB stabilize at 83–214 MiB/s. Key length has no systematic impact (ANOVA variations are non-monotonic scheduling noise).</a:t>
+            </a:r>
+          </a:p>
+          <a:p>
+            <a:pPr>
+              <a:spcBef>
+                <a:spcPts val="800"/>
+              </a:spcBef>
+              <a:defRPr b="1" sz="1300">
+                <a:solidFill>
+                  <a:srgbClr val="0B2545"/>
+                </a:solidFill>
+              </a:defRPr>
+            </a:pPr>
+            <a:r>
+              <a:t>100% Round-Trip Correctness: </a:t>
+            </a:r>
+            <a:r>
+              <a:rPr b="0">
+                <a:solidFill>
+                  <a:srgbClr val="282828"/>
+                </a:solidFill>
+              </a:rPr>
+              <a:t>SHA-256 digests verified 100% match across all 1,820 trials with 0 silent failures.</a:t>
+            </a:r>
+          </a:p>
+        </p:txBody>
+      </p:sp>
+      <p:pic>
+        <p:nvPicPr>
+          <p:cNvPr id="4" name="Picture 3" descr="fig11_key_size_heatmap.png"/>
+          <p:cNvPicPr>
+            <a:picLocks noChangeAspect="1"/>
+          </p:cNvPicPr>
           <p:nvPr/>
-        </p:nvSpPr>
+        </p:nvPicPr>
+        <p:blipFill>
+          <a:blip r:embed="rId2"/>
+          <a:stretch>
+            <a:fillRect/>
+          </a:stretch>
+        </p:blipFill>
         <p:spPr>
           <a:xfrm>
-            <a:off x="731520" y="1463040"/>
-            <a:ext cx="7680960" cy="4754880"/>
+            <a:off x="6217920" y="1645920"/>
+            <a:ext cx="5303520" cy="3644746"/>
           </a:xfrm>
           <a:prstGeom prst="rect">
             <a:avLst/>
           </a:prstGeom>
-          <a:noFill/>
         </p:spPr>
-        <p:txBody>
-          <a:bodyPr wrap="square">
-            <a:spAutoFit/>
-          </a:bodyPr>
-          <a:lstStyle/>
-          <a:p/>
-          <a:p>
-            <a:pPr>
-              <a:defRPr sz="1300" b="1">
-                <a:solidFill>
-                  <a:srgbClr val="102C57"/>
-                </a:solidFill>
-              </a:defRPr>
-            </a:pPr>
-            <a:r>
-              <a:t>• 14 Benchmark Key Lengths: </a:t>
-            </a:r>
-            <a:r>
-              <a:rPr b="0">
-                <a:solidFill>
-                  <a:srgbClr val="212529"/>
-                </a:solidFill>
-              </a:rPr>
-              <a:t>32, 64, 96, 128, 160, 192, 224, 256, 288, 320, 352, 384, 416, and 448 bits (4 to 56 bytes). Generated using cryptographically secure secrets.token_bytes().</a:t>
-            </a:r>
-          </a:p>
-          <a:p>
-            <a:pPr>
-              <a:defRPr sz="1300" b="1">
-                <a:solidFill>
-                  <a:srgbClr val="102C57"/>
-                </a:solidFill>
-              </a:defRPr>
-            </a:pPr>
-            <a:r>
-              <a:t>• 5 Workload Payload Sizes: </a:t>
-            </a:r>
-            <a:r>
-              <a:rPr b="0">
-                <a:solidFill>
-                  <a:srgbClr val="212529"/>
-                </a:solidFill>
-              </a:rPr>
-              <a:t>1 KiB, 100 KiB, 1 MiB, 10 MiB, and 50 MiB. Pre-generated deterministically with baseline SHA-256 digests.</a:t>
-            </a:r>
-          </a:p>
-          <a:p>
-            <a:pPr>
-              <a:defRPr sz="1300" b="1">
-                <a:solidFill>
-                  <a:srgbClr val="102C57"/>
-                </a:solidFill>
-              </a:defRPr>
-            </a:pPr>
-            <a:r>
-              <a:t>• Repetition &amp; Warm-up Policy: </a:t>
-            </a:r>
-            <a:r>
-              <a:rPr b="0">
-                <a:solidFill>
-                  <a:srgbClr val="212529"/>
-                </a:solidFill>
-              </a:rPr>
-              <a:t>3 warm-up cycles (excluded from statistics) + 10 measured repetitions per configuration = 1,820 total raw trials.</a:t>
-            </a:r>
-          </a:p>
-          <a:p>
-            <a:pPr>
-              <a:defRPr sz="1300" b="1">
-                <a:solidFill>
-                  <a:srgbClr val="102C57"/>
-                </a:solidFill>
-              </a:defRPr>
-            </a:pPr>
-            <a:r>
-              <a:t>• Operational Mode &amp; Padding: </a:t>
-            </a:r>
-            <a:r>
-              <a:rPr b="0">
-                <a:solidFill>
-                  <a:srgbClr val="212529"/>
-                </a:solidFill>
-              </a:rPr>
-              <a:t>NIST SP 800-38A CBC mode with fresh 64-bit random IV per trial (no IV reuse) and PKCS#7 block alignment.</a:t>
-            </a:r>
-          </a:p>
-          <a:p>
-            <a:pPr>
-              <a:defRPr sz="1300" b="1">
-                <a:solidFill>
-                  <a:srgbClr val="102C57"/>
-                </a:solidFill>
-              </a:defRPr>
-            </a:pPr>
-            <a:r>
-              <a:t>• High-Resolution Timing &amp; Isolation: </a:t>
-            </a:r>
-            <a:r>
-              <a:rPr b="0">
-                <a:solidFill>
-                  <a:srgbClr val="212529"/>
-                </a:solidFill>
-              </a:rPr>
-              <a:t>Hardware monotonic timing via time.perf_counter_ns(). Steady-state encryption isolated from I/O and setup.</a:t>
-            </a:r>
-          </a:p>
-        </p:txBody>
-      </p:sp>
+      </p:pic>
     </p:spTree>
   </p:cSld>
   <p:clrMapOvr>
@@ -5320,7 +4021,7 @@
         <p:spPr>
           <a:xfrm>
             <a:off x="731520" y="365760"/>
-            <a:ext cx="7680960" cy="365760"/>
+            <a:ext cx="10698480" cy="1005840"/>
           </a:xfrm>
           <a:prstGeom prst="rect">
             <a:avLst/>
@@ -5336,12 +4037,26 @@
             <a:pPr>
               <a:defRPr sz="1000" b="1">
                 <a:solidFill>
-                  <a:srgbClr val="009688"/>
-                </a:solidFill>
+                  <a:srgbClr val="0096D6"/>
+                </a:solidFill>
+                <a:latin typeface="Arial"/>
               </a:defRPr>
             </a:pPr>
             <a:r>
-              <a:t>SPIT CNS COLLABORATIVE R&amp;D 2026-27</a:t>
+              <a:t>CNS RESEARCH DEFENSE &amp;BULL; A.Y. 2026–27</a:t>
+            </a:r>
+          </a:p>
+          <a:p>
+            <a:pPr>
+              <a:defRPr sz="2200" b="1">
+                <a:solidFill>
+                  <a:srgbClr val="0B2545"/>
+                </a:solidFill>
+                <a:latin typeface="Arial"/>
+              </a:defRPr>
+            </a:pPr>
+            <a:r>
+              <a:t>Three-Tier Memory Profiling Hierarchy</a:t>
             </a:r>
           </a:p>
         </p:txBody>
@@ -5354,8 +4069,8 @@
         </p:nvSpPr>
         <p:spPr>
           <a:xfrm>
-            <a:off x="731520" y="640080"/>
-            <a:ext cx="7680960" cy="731520"/>
+            <a:off x="731520" y="1463040"/>
+            <a:ext cx="10698480" cy="4754880"/>
           </a:xfrm>
           <a:prstGeom prst="rect">
             <a:avLst/>
@@ -5369,97 +4084,74 @@
           <a:lstStyle/>
           <a:p>
             <a:pPr>
-              <a:defRPr sz="2200" b="1">
-                <a:solidFill>
-                  <a:srgbClr val="102C57"/>
+              <a:spcBef>
+                <a:spcPts val="1200"/>
+              </a:spcBef>
+              <a:defRPr b="1" sz="1400">
+                <a:solidFill>
+                  <a:srgbClr val="0B2545"/>
                 </a:solidFill>
               </a:defRPr>
             </a:pPr>
             <a:r>
-              <a:t>Experimental Findings: Cipher Initialization &amp; Key Schedule</a:t>
-            </a:r>
-          </a:p>
-        </p:txBody>
-      </p:sp>
-      <p:pic>
-        <p:nvPicPr>
-          <p:cNvPr id="4" name="Picture 3" descr="fig01_key_vs_init_time.png"/>
-          <p:cNvPicPr>
-            <a:picLocks noChangeAspect="1"/>
-          </p:cNvPicPr>
-          <p:nvPr/>
-        </p:nvPicPr>
-        <p:blipFill>
-          <a:blip r:embed="rId2"/>
-          <a:stretch>
-            <a:fillRect/>
-          </a:stretch>
-        </p:blipFill>
-        <p:spPr>
-          <a:xfrm>
-            <a:off x="731520" y="1463040"/>
-            <a:ext cx="3749039" cy="2318338"/>
-          </a:xfrm>
-          <a:prstGeom prst="rect">
-            <a:avLst/>
-          </a:prstGeom>
-        </p:spPr>
-      </p:pic>
-      <p:pic>
-        <p:nvPicPr>
-          <p:cNvPr id="5" name="Picture 4" descr="fig02_init_time_variability.png"/>
-          <p:cNvPicPr>
-            <a:picLocks noChangeAspect="1"/>
-          </p:cNvPicPr>
-          <p:nvPr/>
-        </p:nvPicPr>
-        <p:blipFill>
-          <a:blip r:embed="rId3"/>
-          <a:stretch>
-            <a:fillRect/>
-          </a:stretch>
-        </p:blipFill>
-        <p:spPr>
-          <a:xfrm>
-            <a:off x="4663440" y="1463040"/>
-            <a:ext cx="3749039" cy="2318338"/>
-          </a:xfrm>
-          <a:prstGeom prst="rect">
-            <a:avLst/>
-          </a:prstGeom>
-        </p:spPr>
-      </p:pic>
-      <p:sp>
-        <p:nvSpPr>
-          <p:cNvPr id="6" name="TextBox 5"/>
-          <p:cNvSpPr txBox="1"/>
-          <p:nvPr/>
-        </p:nvSpPr>
-        <p:spPr>
-          <a:xfrm>
-            <a:off x="731520" y="5120640"/>
-            <a:ext cx="7680960" cy="1371600"/>
-          </a:xfrm>
-          <a:prstGeom prst="rect">
-            <a:avLst/>
-          </a:prstGeom>
-          <a:noFill/>
-        </p:spPr>
-        <p:txBody>
-          <a:bodyPr wrap="square">
-            <a:spAutoFit/>
-          </a:bodyPr>
-          <a:lstStyle/>
+              <a:t>Tier 1: Theoretical Algorithmic Subkeys (Constant 4,168 Bytes)</a:t>
+            </a:r>
+            <a:br/>
+            <a:r>
+              <a:rPr b="0" sz="1200">
+                <a:solidFill>
+                  <a:srgbClr val="282828"/>
+                </a:solidFill>
+              </a:rPr>
+              <a:t>Fixed C-level memory: 18 P-array words (72 B) + 1,024 S-box words (4,096 B). Mathematically identical whether key is 32 bits or 448 bits.</a:t>
+            </a:r>
+          </a:p>
           <a:p>
             <a:pPr>
-              <a:defRPr sz="1100" b="1">
-                <a:solidFill>
-                  <a:srgbClr val="212529"/>
+              <a:spcBef>
+                <a:spcPts val="1200"/>
+              </a:spcBef>
+              <a:defRPr b="1" sz="1400">
+                <a:solidFill>
+                  <a:srgbClr val="0B2545"/>
                 </a:solidFill>
               </a:defRPr>
             </a:pPr>
             <a:r>
-              <a:t>Key Takeaway: Mean initialization time hovers stably between 0.04 ms and 0.10 ms across all 14 key sizes. One-way ANOVA yields p = 0.1548 (&gt; 0.05), and linear regression yields R² = 0.0051, empirically confirming that secret key length does NOT scale initialization latency.</a:t>
+              <a:t>Tier 2: Python Runtime Heap Allocation via tracemalloc (~168.52 MiB for 50 MiB)</a:t>
+            </a:r>
+            <a:br/>
+            <a:r>
+              <a:rPr b="0" sz="1200">
+                <a:solidFill>
+                  <a:srgbClr val="282828"/>
+                </a:solidFill>
+              </a:rPr>
+              <a:t>Tracks plaintext buffer, PKCS#7 padding, and ciphertext objects. Across the entire 416-bit key range (32 to 448 bits), peak heap delta is only 186 bytes (&lt;0.0001%), attributable solely to Python bytes object metadata.</a:t>
+            </a:r>
+          </a:p>
+          <a:p>
+            <a:pPr>
+              <a:spcBef>
+                <a:spcPts val="1200"/>
+              </a:spcBef>
+              <a:defRPr b="1" sz="1400">
+                <a:solidFill>
+                  <a:srgbClr val="0B2545"/>
+                </a:solidFill>
+              </a:defRPr>
+            </a:pPr>
+            <a:r>
+              <a:t>Tier 3: Operating System Process Working Set via psutil RSS (~265.6 MiB)</a:t>
+            </a:r>
+            <a:br/>
+            <a:r>
+              <a:rPr b="0" sz="1200">
+                <a:solidFill>
+                  <a:srgbClr val="282828"/>
+                </a:solidFill>
+              </a:rPr>
+              <a:t>Whole-process physical RAM containing Python interpreter, compiled C extensions, and OS memory pools. Strictly constant across all key lengths.</a:t>
             </a:r>
           </a:p>
         </p:txBody>
@@ -5491,7 +4183,7 @@
         <p:spPr>
           <a:xfrm>
             <a:off x="731520" y="365760"/>
-            <a:ext cx="7680960" cy="365760"/>
+            <a:ext cx="10698480" cy="1005840"/>
           </a:xfrm>
           <a:prstGeom prst="rect">
             <a:avLst/>
@@ -5507,12 +4199,26 @@
             <a:pPr>
               <a:defRPr sz="1000" b="1">
                 <a:solidFill>
-                  <a:srgbClr val="009688"/>
-                </a:solidFill>
+                  <a:srgbClr val="0096D6"/>
+                </a:solidFill>
+                <a:latin typeface="Arial"/>
               </a:defRPr>
             </a:pPr>
             <a:r>
-              <a:t>SPIT CNS COLLABORATIVE R&amp;D 2026-27</a:t>
+              <a:t>CNS RESEARCH DEFENSE &amp;BULL; A.Y. 2026–27</a:t>
+            </a:r>
+          </a:p>
+          <a:p>
+            <a:pPr>
+              <a:defRPr sz="2200" b="1">
+                <a:solidFill>
+                  <a:srgbClr val="0B2545"/>
+                </a:solidFill>
+                <a:latin typeface="Arial"/>
+              </a:defRPr>
+            </a:pPr>
+            <a:r>
+              <a:t>Practical Security Boundaries: The Sweet32 Collision Attack</a:t>
             </a:r>
           </a:p>
         </p:txBody>
@@ -5525,8 +4231,8 @@
         </p:nvSpPr>
         <p:spPr>
           <a:xfrm>
-            <a:off x="731520" y="640080"/>
-            <a:ext cx="7680960" cy="731520"/>
+            <a:off x="731520" y="1463040"/>
+            <a:ext cx="10698480" cy="4754880"/>
           </a:xfrm>
           <a:prstGeom prst="rect">
             <a:avLst/>
@@ -5540,97 +4246,74 @@
           <a:lstStyle/>
           <a:p>
             <a:pPr>
-              <a:defRPr sz="2200" b="1">
-                <a:solidFill>
-                  <a:srgbClr val="102C57"/>
+              <a:spcBef>
+                <a:spcPts val="1200"/>
+              </a:spcBef>
+              <a:defRPr b="1" sz="1400">
+                <a:solidFill>
+                  <a:srgbClr val="0B2545"/>
                 </a:solidFill>
               </a:defRPr>
             </a:pPr>
             <a:r>
-              <a:t>Experimental Findings: Throughput &amp; Latency Scaling</a:t>
-            </a:r>
-          </a:p>
-        </p:txBody>
-      </p:sp>
-      <p:pic>
-        <p:nvPicPr>
-          <p:cNvPr id="4" name="Picture 3" descr="fig03_enc_throughput_vs_size.png"/>
-          <p:cNvPicPr>
-            <a:picLocks noChangeAspect="1"/>
-          </p:cNvPicPr>
-          <p:nvPr/>
-        </p:nvPicPr>
-        <p:blipFill>
-          <a:blip r:embed="rId2"/>
-          <a:stretch>
-            <a:fillRect/>
-          </a:stretch>
-        </p:blipFill>
-        <p:spPr>
-          <a:xfrm>
-            <a:off x="731520" y="1463040"/>
-            <a:ext cx="3749039" cy="2268302"/>
-          </a:xfrm>
-          <a:prstGeom prst="rect">
-            <a:avLst/>
-          </a:prstGeom>
-        </p:spPr>
-      </p:pic>
-      <p:pic>
-        <p:nvPicPr>
-          <p:cNvPr id="5" name="Picture 4" descr="fig05_key_vs_throughput_panels.png"/>
-          <p:cNvPicPr>
-            <a:picLocks noChangeAspect="1"/>
-          </p:cNvPicPr>
-          <p:nvPr/>
-        </p:nvPicPr>
-        <p:blipFill>
-          <a:blip r:embed="rId3"/>
-          <a:stretch>
-            <a:fillRect/>
-          </a:stretch>
-        </p:blipFill>
-        <p:spPr>
-          <a:xfrm>
-            <a:off x="4663440" y="1463040"/>
-            <a:ext cx="3749039" cy="1985033"/>
-          </a:xfrm>
-          <a:prstGeom prst="rect">
-            <a:avLst/>
-          </a:prstGeom>
-        </p:spPr>
-      </p:pic>
-      <p:sp>
-        <p:nvSpPr>
-          <p:cNvPr id="6" name="TextBox 5"/>
-          <p:cNvSpPr txBox="1"/>
-          <p:nvPr/>
-        </p:nvSpPr>
-        <p:spPr>
-          <a:xfrm>
-            <a:off x="731520" y="5120640"/>
-            <a:ext cx="7680960" cy="1371600"/>
-          </a:xfrm>
-          <a:prstGeom prst="rect">
-            <a:avLst/>
-          </a:prstGeom>
-          <a:noFill/>
-        </p:spPr>
-        <p:txBody>
-          <a:bodyPr wrap="square">
-            <a:spAutoFit/>
-          </a:bodyPr>
-          <a:lstStyle/>
+              <a:t>The 64-Bit Block Size Constraint:</a:t>
+            </a:r>
+            <a:br/>
+            <a:r>
+              <a:rPr b="0" sz="1200">
+                <a:solidFill>
+                  <a:srgbClr val="282828"/>
+                </a:solidFill>
+              </a:rPr>
+              <a:t>Blowfish encrypts in 64-bit blocks (b = 64). Under the Birthday Paradox, ciphertext collision probability exceeds 50% after encrypting only 2^{b/2} = 2^{32} blocks (32 GiB of data).</a:t>
+            </a:r>
+          </a:p>
           <a:p>
             <a:pPr>
-              <a:defRPr sz="1100" b="1">
-                <a:solidFill>
-                  <a:srgbClr val="212529"/>
+              <a:spcBef>
+                <a:spcPts val="1200"/>
+              </a:spcBef>
+              <a:defRPr b="1" sz="1400">
+                <a:solidFill>
+                  <a:srgbClr val="0B2545"/>
                 </a:solidFill>
               </a:defRPr>
             </a:pPr>
             <a:r>
-              <a:t>Key Takeaway: Throughput exhibits steep initial amortization (~15 MiB/s at 1 KiB) before plateauing at ~130–190 MiB/s for workloads &gt;= 1 MiB. Figure 5 demonstrates near-identical throughput bars across all 14 key sizes, proving steady-state encryption throughput is invariant to key length.</a:t>
+              <a:t>The Sweet32 Attack (Bhargavan &amp; Leurent, 2016):</a:t>
+            </a:r>
+            <a:br/>
+            <a:r>
+              <a:rPr b="0" sz="1200">
+                <a:solidFill>
+                  <a:srgbClr val="282828"/>
+                </a:solidFill>
+              </a:rPr>
+              <a:t>In HTTPS over TLS or OpenVPN using CBC mode, an active network attacker can monitor ciphertext collisions to recover sensitive session cookies and credentials.</a:t>
+            </a:r>
+          </a:p>
+          <a:p>
+            <a:pPr>
+              <a:spcBef>
+                <a:spcPts val="1200"/>
+              </a:spcBef>
+              <a:defRPr b="1" sz="1400">
+                <a:solidFill>
+                  <a:srgbClr val="0B2545"/>
+                </a:solidFill>
+              </a:defRPr>
+            </a:pPr>
+            <a:r>
+              <a:t>Cryptographic Recommendation:</a:t>
+            </a:r>
+            <a:br/>
+            <a:r>
+              <a:rPr b="0" sz="1200">
+                <a:solidFill>
+                  <a:srgbClr val="282828"/>
+                </a:solidFill>
+              </a:rPr>
+              <a:t>While Blowfish's variable key length (up to 448 bits) provides impenetrable defense against brute-force key search, its 64-bit block size renders it obsolete for high-volume streams. Modern protocols must prefer 128-bit block ciphers (AES-GCM / ChaCha20-Poly1305).</a:t>
             </a:r>
           </a:p>
         </p:txBody>
@@ -5662,7 +4345,7 @@
         <p:spPr>
           <a:xfrm>
             <a:off x="731520" y="365760"/>
-            <a:ext cx="7680960" cy="365760"/>
+            <a:ext cx="10698480" cy="1005840"/>
           </a:xfrm>
           <a:prstGeom prst="rect">
             <a:avLst/>
@@ -5678,12 +4361,26 @@
             <a:pPr>
               <a:defRPr sz="1000" b="1">
                 <a:solidFill>
-                  <a:srgbClr val="009688"/>
-                </a:solidFill>
+                  <a:srgbClr val="0096D6"/>
+                </a:solidFill>
+                <a:latin typeface="Arial"/>
               </a:defRPr>
             </a:pPr>
             <a:r>
-              <a:t>SPIT CNS COLLABORATIVE R&amp;D 2026-27</a:t>
+              <a:t>CNS RESEARCH DEFENSE &amp;BULL; A.Y. 2026–27</a:t>
+            </a:r>
+          </a:p>
+          <a:p>
+            <a:pPr>
+              <a:defRPr sz="2200" b="1">
+                <a:solidFill>
+                  <a:srgbClr val="0B2545"/>
+                </a:solidFill>
+                <a:latin typeface="Arial"/>
+              </a:defRPr>
+            </a:pPr>
+            <a:r>
+              <a:t>Conclusions &amp; Faculty Viva Defense Readiness</a:t>
             </a:r>
           </a:p>
         </p:txBody>
@@ -5696,8 +4393,8 @@
         </p:nvSpPr>
         <p:spPr>
           <a:xfrm>
-            <a:off x="731520" y="640080"/>
-            <a:ext cx="7680960" cy="731520"/>
+            <a:off x="731520" y="1463040"/>
+            <a:ext cx="10698480" cy="4754880"/>
           </a:xfrm>
           <a:prstGeom prst="rect">
             <a:avLst/>
@@ -5711,289 +4408,98 @@
           <a:lstStyle/>
           <a:p>
             <a:pPr>
-              <a:defRPr sz="2200" b="1">
-                <a:solidFill>
-                  <a:srgbClr val="102C57"/>
+              <a:spcBef>
+                <a:spcPts val="1000"/>
+              </a:spcBef>
+              <a:defRPr b="1" sz="1400">
+                <a:solidFill>
+                  <a:srgbClr val="0B2545"/>
                 </a:solidFill>
               </a:defRPr>
             </a:pPr>
             <a:r>
-              <a:t>Experimental Findings: Memory Allocation &amp; Invariance</a:t>
-            </a:r>
-          </a:p>
-        </p:txBody>
-      </p:sp>
-      <p:pic>
-        <p:nvPicPr>
-          <p:cNvPr id="4" name="Picture 3" descr="fig08_memory_vs_file_size.png"/>
-          <p:cNvPicPr>
-            <a:picLocks noChangeAspect="1"/>
-          </p:cNvPicPr>
-          <p:nvPr/>
-        </p:nvPicPr>
-        <p:blipFill>
-          <a:blip r:embed="rId2"/>
-          <a:stretch>
-            <a:fillRect/>
-          </a:stretch>
-        </p:blipFill>
-        <p:spPr>
-          <a:xfrm>
-            <a:off x="731520" y="1463040"/>
-            <a:ext cx="3749039" cy="1563420"/>
-          </a:xfrm>
-          <a:prstGeom prst="rect">
-            <a:avLst/>
-          </a:prstGeom>
-        </p:spPr>
-      </p:pic>
-      <p:pic>
-        <p:nvPicPr>
-          <p:cNvPr id="5" name="Picture 4" descr="fig09_memory_vs_key_length.png"/>
-          <p:cNvPicPr>
-            <a:picLocks noChangeAspect="1"/>
-          </p:cNvPicPr>
-          <p:nvPr/>
-        </p:nvPicPr>
-        <p:blipFill>
-          <a:blip r:embed="rId3"/>
-          <a:stretch>
-            <a:fillRect/>
-          </a:stretch>
-        </p:blipFill>
-        <p:spPr>
-          <a:xfrm>
-            <a:off x="4663440" y="1463040"/>
-            <a:ext cx="3749039" cy="2179847"/>
-          </a:xfrm>
-          <a:prstGeom prst="rect">
-            <a:avLst/>
-          </a:prstGeom>
-        </p:spPr>
-      </p:pic>
-      <p:sp>
-        <p:nvSpPr>
-          <p:cNvPr id="6" name="TextBox 5"/>
-          <p:cNvSpPr txBox="1"/>
-          <p:nvPr/>
-        </p:nvSpPr>
-        <p:spPr>
-          <a:xfrm>
-            <a:off x="731520" y="5120640"/>
-            <a:ext cx="7680960" cy="1371600"/>
-          </a:xfrm>
-          <a:prstGeom prst="rect">
-            <a:avLst/>
-          </a:prstGeom>
-          <a:noFill/>
-        </p:spPr>
-        <p:txBody>
-          <a:bodyPr wrap="square">
-            <a:spAutoFit/>
-          </a:bodyPr>
-          <a:lstStyle/>
+              <a:t>1. Key Invariance Proved:</a:t>
+            </a:r>
+            <a:br/>
+            <a:r>
+              <a:rPr b="0" sz="1200">
+                <a:solidFill>
+                  <a:srgbClr val="282828"/>
+                </a:solidFill>
+              </a:rPr>
+              <a:t>Secret key length does NOT increase memory consumption or reduce steady-state encryption throughput.</a:t>
+            </a:r>
+          </a:p>
           <a:p>
             <a:pPr>
-              <a:defRPr sz="1100" b="1">
-                <a:solidFill>
-                  <a:srgbClr val="212529"/>
+              <a:spcBef>
+                <a:spcPts val="1000"/>
+              </a:spcBef>
+              <a:defRPr b="1" sz="1400">
+                <a:solidFill>
+                  <a:srgbClr val="0B2545"/>
                 </a:solidFill>
               </a:defRPr>
             </a:pPr>
             <a:r>
-              <a:t>Key Takeaway: Python heap allocation (tracemalloc) scales strictly with workload buffer size. Figure 9 reveals a flat line across all 14 key lengths: the difference between 32-bit and 448-bit keys is under 200 bytes, confirming that Blowfish expanded subkeys occupy constant memory (4,168 bytes).</a:t>
-            </a:r>
-          </a:p>
-        </p:txBody>
-      </p:sp>
-    </p:spTree>
-  </p:cSld>
-  <p:clrMapOvr>
-    <a:masterClrMapping/>
-  </p:clrMapOvr>
-</p:sld>
-</file>
-
-<file path=ppt/slides/slide9.xml><?xml version="1.0" encoding="utf-8"?>
-<p:sld xmlns:a="http://schemas.openxmlformats.org/drawingml/2006/main" xmlns:p="http://schemas.openxmlformats.org/presentationml/2006/main" xmlns:r="http://schemas.openxmlformats.org/officeDocument/2006/relationships">
-  <p:cSld>
-    <p:spTree>
-      <p:nvGrpSpPr>
-        <p:cNvPr id="1" name=""/>
-        <p:cNvGrpSpPr/>
-        <p:nvPr/>
-      </p:nvGrpSpPr>
-      <p:grpSpPr/>
-      <p:sp>
-        <p:nvSpPr>
-          <p:cNvPr id="2" name="TextBox 1"/>
-          <p:cNvSpPr txBox="1"/>
-          <p:nvPr/>
-        </p:nvSpPr>
-        <p:spPr>
-          <a:xfrm>
-            <a:off x="731520" y="365760"/>
-            <a:ext cx="7680960" cy="365760"/>
-          </a:xfrm>
-          <a:prstGeom prst="rect">
-            <a:avLst/>
-          </a:prstGeom>
-          <a:noFill/>
-        </p:spPr>
-        <p:txBody>
-          <a:bodyPr wrap="square">
-            <a:spAutoFit/>
-          </a:bodyPr>
-          <a:lstStyle/>
+              <a:t>2. Warm-Up Policy Essential:</a:t>
+            </a:r>
+            <a:br/>
+            <a:r>
+              <a:rPr b="0" sz="1200">
+                <a:solidFill>
+                  <a:srgbClr val="282828"/>
+                </a:solidFill>
+              </a:rPr>
+              <a:t>Dynamic library loading accounts for cold-start artifacts (~7.88 ms); steady-state setup is ~0.056–0.162 ms.</a:t>
+            </a:r>
+          </a:p>
           <a:p>
             <a:pPr>
-              <a:defRPr sz="1000" b="1">
-                <a:solidFill>
-                  <a:srgbClr val="009688"/>
+              <a:spcBef>
+                <a:spcPts val="1000"/>
+              </a:spcBef>
+              <a:defRPr b="1" sz="1400">
+                <a:solidFill>
+                  <a:srgbClr val="0B2545"/>
                 </a:solidFill>
               </a:defRPr>
             </a:pPr>
             <a:r>
-              <a:t>SPIT CNS COLLABORATIVE R&amp;D 2026-27</a:t>
-            </a:r>
-          </a:p>
-        </p:txBody>
-      </p:sp>
-      <p:sp>
-        <p:nvSpPr>
-          <p:cNvPr id="3" name="TextBox 2"/>
-          <p:cNvSpPr txBox="1"/>
-          <p:nvPr/>
-        </p:nvSpPr>
-        <p:spPr>
-          <a:xfrm>
-            <a:off x="731520" y="640080"/>
-            <a:ext cx="7680960" cy="731520"/>
-          </a:xfrm>
-          <a:prstGeom prst="rect">
-            <a:avLst/>
-          </a:prstGeom>
-          <a:noFill/>
-        </p:spPr>
-        <p:txBody>
-          <a:bodyPr wrap="square">
-            <a:spAutoFit/>
-          </a:bodyPr>
-          <a:lstStyle/>
+              <a:t>3. Comprehensive Deliverables:</a:t>
+            </a:r>
+            <a:br/>
+            <a:r>
+              <a:rPr b="0" sz="1200">
+                <a:solidFill>
+                  <a:srgbClr val="282828"/>
+                </a:solidFill>
+              </a:rPr>
+              <a:t>All 4 phases validated: 1,820 trials, 12 figures at 300 DPI, 3 reconciled tables, Overleaf-ready LaTeX paper, and reproducible Python engine.</a:t>
+            </a:r>
+          </a:p>
           <a:p>
             <a:pPr>
-              <a:defRPr sz="2200" b="1">
-                <a:solidFill>
-                  <a:srgbClr val="102C57"/>
+              <a:spcBef>
+                <a:spcPts val="1000"/>
+              </a:spcBef>
+              <a:defRPr b="1" sz="1400">
+                <a:solidFill>
+                  <a:srgbClr val="0B2545"/>
                 </a:solidFill>
               </a:defRPr>
             </a:pPr>
             <a:r>
-              <a:t>Security Considerations &amp; Cryptographic Limitations</a:t>
-            </a:r>
-          </a:p>
-        </p:txBody>
-      </p:sp>
-      <p:sp>
-        <p:nvSpPr>
-          <p:cNvPr id="4" name="TextBox 3"/>
-          <p:cNvSpPr txBox="1"/>
-          <p:nvPr/>
-        </p:nvSpPr>
-        <p:spPr>
-          <a:xfrm>
-            <a:off x="731520" y="1463040"/>
-            <a:ext cx="7680960" cy="4754880"/>
-          </a:xfrm>
-          <a:prstGeom prst="rect">
-            <a:avLst/>
-          </a:prstGeom>
-          <a:noFill/>
-        </p:spPr>
-        <p:txBody>
-          <a:bodyPr wrap="square">
-            <a:spAutoFit/>
-          </a:bodyPr>
-          <a:lstStyle/>
-          <a:p/>
-          <a:p>
-            <a:pPr>
-              <a:defRPr sz="1300" b="1">
-                <a:solidFill>
-                  <a:srgbClr val="102C57"/>
-                </a:solidFill>
-              </a:defRPr>
-            </a:pPr>
-            <a:r>
-              <a:t>• The Sweet32 Attack (ACM CCS 2016): </a:t>
-            </a:r>
-            <a:r>
-              <a:rPr b="0">
-                <a:solidFill>
-                  <a:srgbClr val="212529"/>
+              <a:t>4. Institutional Compliance:</a:t>
+            </a:r>
+            <a:br/>
+            <a:r>
+              <a:rPr b="0" sz="1200">
+                <a:solidFill>
+                  <a:srgbClr val="282828"/>
                 </a:solidFill>
               </a:rPr>
-              <a:t>Blowfish has a 64-bit block size. By the Birthday Paradox, ciphertext collisions occur with 50% probability after encrypting 2^32 blocks (32 GiB). Bhargavan &amp; Leurent proved practical session-token recovery in TLS and OpenVPN.</a:t>
-            </a:r>
-          </a:p>
-          <a:p>
-            <a:pPr>
-              <a:defRPr sz="1300" b="1">
-                <a:solidFill>
-                  <a:srgbClr val="102C57"/>
-                </a:solidFill>
-              </a:defRPr>
-            </a:pPr>
-            <a:r>
-              <a:t>• Deprecation in High-Volume Protocols: </a:t>
-            </a:r>
-            <a:r>
-              <a:rPr b="0">
-                <a:solidFill>
-                  <a:srgbClr val="212529"/>
-                </a:solidFill>
-              </a:rPr>
-              <a:t>Due to the 32 GiB boundary, Blowfish is officially deprecated for large data streams. Modern deployments require 128-bit block ciphers like AES-GCM.</a:t>
-            </a:r>
-          </a:p>
-          <a:p>
-            <a:pPr>
-              <a:defRPr sz="1300" b="1">
-                <a:solidFill>
-                  <a:srgbClr val="102C57"/>
-                </a:solidFill>
-              </a:defRPr>
-            </a:pPr>
-            <a:r>
-              <a:t>• Malleability of CBC Mode: </a:t>
-            </a:r>
-            <a:r>
-              <a:rPr b="0">
-                <a:solidFill>
-                  <a:srgbClr val="212529"/>
-                </a:solidFill>
-              </a:rPr>
-              <a:t>Standard CBC provides confidentiality but not authenticity. Adversaries can introduce controlled bit flips in ciphertext. Production systems require Encrypt-then-MAC or AEAD.</a:t>
-            </a:r>
-          </a:p>
-          <a:p>
-            <a:pPr>
-              <a:defRPr sz="1300" b="1">
-                <a:solidFill>
-                  <a:srgbClr val="102C57"/>
-                </a:solidFill>
-              </a:defRPr>
-            </a:pPr>
-            <a:r>
-              <a:t>• Functional Correctness vs. Security: </a:t>
-            </a:r>
-            <a:r>
-              <a:rPr b="0">
-                <a:solidFill>
-                  <a:srgbClr val="212529"/>
-                </a:solidFill>
-              </a:rPr>
-              <a:t>Our 100% pass rate across all 1,820 trials confirms functional implementation correctness, but does not imply resistance to advanced mathematical cryptanalysis.</a:t>
+              <a:t>Strict adherence to Prof. Renuka Pawar's Collaborative R&amp;D guidelines, phase-wise output ownership, and verified deliverables manifest.</a:t>
             </a:r>
           </a:p>
         </p:txBody>
@@ -6324,324 +4830,4 @@
   </a:objectDefaults>
   <a:extraClrSchemeLst/>
 </a:theme>
-</file>
-
-<file path=ppt/theme/theme2.xml><?xml version="1.0" encoding="utf-8"?>
-<a:theme xmlns:a="http://schemas.openxmlformats.org/drawingml/2006/main" name="Office Theme">
-  <a:themeElements>
-    <a:clrScheme name="Office">
-      <a:dk1>
-        <a:sysClr val="windowText" lastClr="000000"/>
-      </a:dk1>
-      <a:lt1>
-        <a:sysClr val="window" lastClr="FFFFFF"/>
-      </a:lt1>
-      <a:dk2>
-        <a:srgbClr val="1F497D"/>
-      </a:dk2>
-      <a:lt2>
-        <a:srgbClr val="EEECE1"/>
-      </a:lt2>
-      <a:accent1>
-        <a:srgbClr val="4F81BD"/>
-      </a:accent1>
-      <a:accent2>
-        <a:srgbClr val="C0504D"/>
-      </a:accent2>
-      <a:accent3>
-        <a:srgbClr val="9BBB59"/>
-      </a:accent3>
-      <a:accent4>
-        <a:srgbClr val="8064A2"/>
-      </a:accent4>
-      <a:accent5>
-        <a:srgbClr val="4BACC6"/>
-      </a:accent5>
-      <a:accent6>
-        <a:srgbClr val="F79646"/>
-      </a:accent6>
-      <a:hlink>
-        <a:srgbClr val="0000FF"/>
-      </a:hlink>
-      <a:folHlink>
-        <a:srgbClr val="800080"/>
-      </a:folHlink>
-    </a:clrScheme>
-    <a:fontScheme name="Office">
-      <a:majorFont>
-        <a:latin typeface="Calibri"/>
-        <a:ea typeface=""/>
-        <a:cs typeface=""/>
-        <a:font script="Jpan" typeface="ＭＳ Ｐゴシック"/>
-        <a:font script="Hang" typeface="맑은 고딕"/>
-        <a:font script="Hans" typeface="宋体"/>
-        <a:font script="Hant" typeface="新細明體"/>
-        <a:font script="Arab" typeface="Times New Roman"/>
-        <a:font script="Hebr" typeface="Times New Roman"/>
-        <a:font script="Thai" typeface="Angsana New"/>
-        <a:font script="Ethi" typeface="Nyala"/>
-        <a:font script="Beng" typeface="Vrinda"/>
-        <a:font script="Gujr" typeface="Shruti"/>
-        <a:font script="Khmr" typeface="MoolBoran"/>
-        <a:font script="Knda" typeface="Tunga"/>
-        <a:font script="Guru" typeface="Raavi"/>
-        <a:font script="Cans" typeface="Euphemia"/>
-        <a:font script="Cher" typeface="Plantagenet Cherokee"/>
-        <a:font script="Yiii" typeface="Microsoft Yi Baiti"/>
-        <a:font script="Tibt" typeface="Microsoft Himalaya"/>
-        <a:font script="Thaa" typeface="MV Boli"/>
-        <a:font script="Deva" typeface="Mangal"/>
-        <a:font script="Telu" typeface="Gautami"/>
-        <a:font script="Taml" typeface="Latha"/>
-        <a:font script="Syrc" typeface="Estrangelo Edessa"/>
-        <a:font script="Orya" typeface="Kalinga"/>
-        <a:font script="Mlym" typeface="Kartika"/>
-        <a:font script="Laoo" typeface="DokChampa"/>
-        <a:font script="Sinh" typeface="Iskoola Pota"/>
-        <a:font script="Mong" typeface="Mongolian Baiti"/>
-        <a:font script="Viet" typeface="Times New Roman"/>
-        <a:font script="Uigh" typeface="Microsoft Uighur"/>
-        <a:font script="Geor" typeface="Sylfaen"/>
-      </a:majorFont>
-      <a:minorFont>
-        <a:latin typeface="Calibri"/>
-        <a:ea typeface=""/>
-        <a:cs typeface=""/>
-        <a:font script="Jpan" typeface="ＭＳ Ｐゴシック"/>
-        <a:font script="Hang" typeface="맑은 고딕"/>
-        <a:font script="Hans" typeface="宋体"/>
-        <a:font script="Hant" typeface="新細明體"/>
-        <a:font script="Arab" typeface="Arial"/>
-        <a:font script="Hebr" typeface="Arial"/>
-        <a:font script="Thai" typeface="Cordia New"/>
-        <a:font script="Ethi" typeface="Nyala"/>
-        <a:font script="Beng" typeface="Vrinda"/>
-        <a:font script="Gujr" typeface="Shruti"/>
-        <a:font script="Khmr" typeface="DaunPenh"/>
-        <a:font script="Knda" typeface="Tunga"/>
-        <a:font script="Guru" typeface="Raavi"/>
-        <a:font script="Cans" typeface="Euphemia"/>
-        <a:font script="Cher" typeface="Plantagenet Cherokee"/>
-        <a:font script="Yiii" typeface="Microsoft Yi Baiti"/>
-        <a:font script="Tibt" typeface="Microsoft Himalaya"/>
-        <a:font script="Thaa" typeface="MV Boli"/>
-        <a:font script="Deva" typeface="Mangal"/>
-        <a:font script="Telu" typeface="Gautami"/>
-        <a:font script="Taml" typeface="Latha"/>
-        <a:font script="Syrc" typeface="Estrangelo Edessa"/>
-        <a:font script="Orya" typeface="Kalinga"/>
-        <a:font script="Mlym" typeface="Kartika"/>
-        <a:font script="Laoo" typeface="DokChampa"/>
-        <a:font script="Sinh" typeface="Iskoola Pota"/>
-        <a:font script="Mong" typeface="Mongolian Baiti"/>
-        <a:font script="Viet" typeface="Arial"/>
-        <a:font script="Uigh" typeface="Microsoft Uighur"/>
-        <a:font script="Geor" typeface="Sylfaen"/>
-      </a:minorFont>
-    </a:fontScheme>
-    <a:fmtScheme name="Office">
-      <a:fillStyleLst>
-        <a:solidFill>
-          <a:schemeClr val="phClr"/>
-        </a:solidFill>
-        <a:gradFill rotWithShape="1">
-          <a:gsLst>
-            <a:gs pos="0">
-              <a:schemeClr val="phClr">
-                <a:tint val="50000"/>
-                <a:satMod val="300000"/>
-              </a:schemeClr>
-            </a:gs>
-            <a:gs pos="35000">
-              <a:schemeClr val="phClr">
-                <a:tint val="37000"/>
-                <a:satMod val="300000"/>
-              </a:schemeClr>
-            </a:gs>
-            <a:gs pos="100000">
-              <a:schemeClr val="phClr">
-                <a:tint val="15000"/>
-                <a:satMod val="350000"/>
-              </a:schemeClr>
-            </a:gs>
-          </a:gsLst>
-          <a:lin ang="16200000" scaled="1"/>
-        </a:gradFill>
-        <a:gradFill rotWithShape="1">
-          <a:gsLst>
-            <a:gs pos="0">
-              <a:schemeClr val="phClr">
-                <a:tint val="100000"/>
-                <a:shade val="100000"/>
-                <a:satMod val="130000"/>
-              </a:schemeClr>
-            </a:gs>
-            <a:gs pos="100000">
-              <a:schemeClr val="phClr">
-                <a:tint val="50000"/>
-                <a:shade val="100000"/>
-                <a:satMod val="350000"/>
-              </a:schemeClr>
-            </a:gs>
-          </a:gsLst>
-          <a:lin ang="16200000" scaled="0"/>
-        </a:gradFill>
-      </a:fillStyleLst>
-      <a:lnStyleLst>
-        <a:ln w="9525" cap="flat" cmpd="sng" algn="ctr">
-          <a:solidFill>
-            <a:schemeClr val="phClr">
-              <a:shade val="95000"/>
-              <a:satMod val="105000"/>
-            </a:schemeClr>
-          </a:solidFill>
-          <a:prstDash val="solid"/>
-        </a:ln>
-        <a:ln w="25400" cap="flat" cmpd="sng" algn="ctr">
-          <a:solidFill>
-            <a:schemeClr val="phClr"/>
-          </a:solidFill>
-          <a:prstDash val="solid"/>
-        </a:ln>
-        <a:ln w="38100" cap="flat" cmpd="sng" algn="ctr">
-          <a:solidFill>
-            <a:schemeClr val="phClr"/>
-          </a:solidFill>
-          <a:prstDash val="solid"/>
-        </a:ln>
-      </a:lnStyleLst>
-      <a:effectStyleLst>
-        <a:effectStyle>
-          <a:effectLst>
-            <a:outerShdw blurRad="40000" dist="20000" dir="5400000" rotWithShape="0">
-              <a:srgbClr val="000000">
-                <a:alpha val="38000"/>
-              </a:srgbClr>
-            </a:outerShdw>
-          </a:effectLst>
-        </a:effectStyle>
-        <a:effectStyle>
-          <a:effectLst>
-            <a:outerShdw blurRad="40000" dist="23000" dir="5400000" rotWithShape="0">
-              <a:srgbClr val="000000">
-                <a:alpha val="35000"/>
-              </a:srgbClr>
-            </a:outerShdw>
-          </a:effectLst>
-        </a:effectStyle>
-        <a:effectStyle>
-          <a:effectLst>
-            <a:outerShdw blurRad="40000" dist="23000" dir="5400000" rotWithShape="0">
-              <a:srgbClr val="000000">
-                <a:alpha val="35000"/>
-              </a:srgbClr>
-            </a:outerShdw>
-          </a:effectLst>
-          <a:scene3d>
-            <a:camera prst="orthographicFront">
-              <a:rot lat="0" lon="0" rev="0"/>
-            </a:camera>
-            <a:lightRig rig="threePt" dir="t">
-              <a:rot lat="0" lon="0" rev="1200000"/>
-            </a:lightRig>
-          </a:scene3d>
-          <a:sp3d>
-            <a:bevelT w="63500" h="25400"/>
-          </a:sp3d>
-        </a:effectStyle>
-      </a:effectStyleLst>
-      <a:bgFillStyleLst>
-        <a:solidFill>
-          <a:schemeClr val="phClr"/>
-        </a:solidFill>
-        <a:gradFill rotWithShape="1">
-          <a:gsLst>
-            <a:gs pos="0">
-              <a:schemeClr val="phClr">
-                <a:tint val="40000"/>
-                <a:satMod val="350000"/>
-              </a:schemeClr>
-            </a:gs>
-            <a:gs pos="40000">
-              <a:schemeClr val="phClr">
-                <a:tint val="45000"/>
-                <a:shade val="99000"/>
-                <a:satMod val="350000"/>
-              </a:schemeClr>
-            </a:gs>
-            <a:gs pos="100000">
-              <a:schemeClr val="phClr">
-                <a:shade val="20000"/>
-                <a:satMod val="255000"/>
-              </a:schemeClr>
-            </a:gs>
-          </a:gsLst>
-          <a:path path="circle">
-            <a:fillToRect l="50000" t="-80000" r="50000" b="180000"/>
-          </a:path>
-        </a:gradFill>
-        <a:gradFill rotWithShape="1">
-          <a:gsLst>
-            <a:gs pos="0">
-              <a:schemeClr val="phClr">
-                <a:tint val="80000"/>
-                <a:satMod val="300000"/>
-              </a:schemeClr>
-            </a:gs>
-            <a:gs pos="100000">
-              <a:schemeClr val="phClr">
-                <a:shade val="30000"/>
-                <a:satMod val="200000"/>
-              </a:schemeClr>
-            </a:gs>
-          </a:gsLst>
-          <a:path path="circle">
-            <a:fillToRect l="50000" t="50000" r="50000" b="50000"/>
-          </a:path>
-        </a:gradFill>
-      </a:bgFillStyleLst>
-    </a:fmtScheme>
-  </a:themeElements>
-  <a:objectDefaults>
-    <a:spDef>
-      <a:spPr/>
-      <a:bodyPr/>
-      <a:lstStyle/>
-      <a:style>
-        <a:lnRef idx="1">
-          <a:schemeClr val="accent1"/>
-        </a:lnRef>
-        <a:fillRef idx="3">
-          <a:schemeClr val="accent1"/>
-        </a:fillRef>
-        <a:effectRef idx="2">
-          <a:schemeClr val="accent1"/>
-        </a:effectRef>
-        <a:fontRef idx="minor">
-          <a:schemeClr val="lt1"/>
-        </a:fontRef>
-      </a:style>
-    </a:spDef>
-    <a:lnDef>
-      <a:spPr/>
-      <a:bodyPr/>
-      <a:lstStyle/>
-      <a:style>
-        <a:lnRef idx="2">
-          <a:schemeClr val="accent1"/>
-        </a:lnRef>
-        <a:fillRef idx="0">
-          <a:schemeClr val="accent1"/>
-        </a:fillRef>
-        <a:effectRef idx="1">
-          <a:schemeClr val="accent1"/>
-        </a:effectRef>
-        <a:fontRef idx="minor">
-          <a:schemeClr val="tx1"/>
-        </a:fontRef>
-      </a:style>
-    </a:lnDef>
-  </a:objectDefaults>
-  <a:extraClrSchemeLst/>
-</a:theme>
 </file>